--- a/docs/gtm/proposal-carmore.pptx
+++ b/docs/gtm/proposal-carmore.pptx
@@ -6264,7 +6264,7 @@
         </p:nvSpPr>
         <p:spPr>
           <a:xfrm>
-            <a:off x="731520" y="4297680"/>
+            <a:off x="731520" y="4133087"/>
             <a:ext cx="10789920" cy="365760"/>
           </a:xfrm>
           <a:prstGeom prst="rect">
@@ -6303,8 +6303,8 @@
         </p:nvSpPr>
         <p:spPr>
           <a:xfrm>
-            <a:off x="731520" y="4663440"/>
-            <a:ext cx="10789920" cy="1280160"/>
+            <a:off x="731520" y="4480560"/>
+            <a:ext cx="10789920" cy="1737360"/>
           </a:xfrm>
           <a:prstGeom prst="rect">
             <a:avLst/>
@@ -6319,7 +6319,7 @@
           <a:p>
             <a:pPr algn="l">
               <a:lnSpc>
-                <a:spcPct val="125000"/>
+                <a:spcPct val="120000"/>
               </a:lnSpc>
             </a:pPr>
             <a:r>
@@ -6333,9 +6333,9 @@
             </a:r>
           </a:p>
           <a:p>
-            <a:pPr algn="l">
-              <a:lnSpc>
-                <a:spcPct val="125000"/>
+            <a:pPr>
+              <a:lnSpc>
+                <a:spcPct val="120000"/>
               </a:lnSpc>
             </a:pPr>
             <a:r>
@@ -6349,9 +6349,9 @@
             </a:r>
           </a:p>
           <a:p>
-            <a:pPr algn="l">
-              <a:lnSpc>
-                <a:spcPct val="125000"/>
+            <a:pPr>
+              <a:lnSpc>
+                <a:spcPct val="120000"/>
               </a:lnSpc>
             </a:pPr>
             <a:r>
@@ -6361,7 +6361,39 @@
                 </a:solidFill>
                 <a:latin typeface="Apple SD Gothic Neo"/>
               </a:rPr>
-              <a:t>• 고객에게 알림톡 URL로 사진을 받는 절차는 공개 자료에서 확인되지 않음 → 미팅에서 확인할 질문</a:t>
+              <a:t>• 공식 FAQ의 알림톡은 '예약 완료 확인' 용도만 확인됨. 아래 두 가지는 미팅에서 확인할 질문:</a:t>
+            </a:r>
+          </a:p>
+          <a:p>
+            <a:pPr>
+              <a:lnSpc>
+                <a:spcPct val="120000"/>
+              </a:lnSpc>
+            </a:pPr>
+            <a:r>
+              <a:rPr sz="1200" b="1">
+                <a:solidFill>
+                  <a:srgbClr val="1D4ED8"/>
+                </a:solidFill>
+                <a:latin typeface="Apple SD Gothic Neo"/>
+              </a:rPr>
+              <a:t>   ① 인수·반납 때 고객에게 차량 사진을 요청·수집하는 절차(알림톡 URL 등)가 있습니까?</a:t>
+            </a:r>
+          </a:p>
+          <a:p>
+            <a:pPr>
+              <a:lnSpc>
+                <a:spcPct val="120000"/>
+              </a:lnSpc>
+            </a:pPr>
+            <a:r>
+              <a:rPr sz="1200" b="1">
+                <a:solidFill>
+                  <a:srgbClr val="1D4ED8"/>
+                </a:solidFill>
+                <a:latin typeface="Apple SD Gothic Neo"/>
+              </a:rPr>
+              <a:t>   ② 카모아 파트너스에서 업체가 고객에게 알림톡·문자를 보내는 기능이 있습니까?</a:t>
             </a:r>
           </a:p>
         </p:txBody>

--- a/docs/gtm/proposal-carmore.pptx
+++ b/docs/gtm/proposal-carmore.pptx
@@ -4503,7 +4503,7 @@
                 </a:solidFill>
                 <a:latin typeface="Apple SD Gothic Neo"/>
               </a:rPr>
-              <a:t>• 흠집·유류 분쟁은 카모아 리뷰 점수를 가장 크게 깎는 항목</a:t>
+              <a:t>• 렌터카 피해구제 1,743건 중 사고·손상 분쟁 617건(35%), 2023년 1위 (한국소비자원)</a:t>
             </a:r>
           </a:p>
           <a:p>
@@ -10239,7 +10239,7 @@
                 </a:solidFill>
                 <a:latin typeface="Apple SD Gothic Neo"/>
               </a:rPr>
-              <a:t>흠집·유류 분쭁 리뷰 감소 → 카모아 리뷰 시스템의 차별점 강화</a:t>
+              <a:t>흠집·과태료 분쟁 후기('기스 20~50만 원', '과태료 2달 뒤 통보') 감소 → 리뷰 시스템 신뢰 강화</a:t>
             </a:r>
           </a:p>
         </p:txBody>

--- a/docs/gtm/proposal-carmore.pptx
+++ b/docs/gtm/proposal-carmore.pptx
@@ -10,6 +10,7 @@
     <p:sldId id="258" r:id="rId9"/>
     <p:sldId id="259" r:id="rId10"/>
     <p:sldId id="260" r:id="rId11"/>
+    <p:sldId id="266" r:id="rId17"/>
     <p:sldId id="261" r:id="rId12"/>
     <p:sldId id="262" r:id="rId13"/>
     <p:sldId id="263" r:id="rId14"/>
@@ -3284,19 +3285,14 @@
             </a:r>
           </a:p>
           <a:p>
-            <a:pPr algn="l">
-              <a:lnSpc>
-                <a:spcPct val="110000"/>
-              </a:lnSpc>
-            </a:pPr>
+            <a:pPr algn="l"/>
             <a:r>
               <a:rPr sz="4000" b="1">
                 <a:solidFill>
                   <a:srgbClr val="FFFFFF"/>
                 </a:solidFill>
-                <a:latin typeface="Apple SD Gothic Neo"/>
-              </a:rPr>
-              <a:t>'검증 계층'을 얹는 제안</a:t>
+              </a:rPr>
+              <a:t>'검증 계층'과 '공동 사서함'을 얹는 제안</a:t>
             </a:r>
           </a:p>
         </p:txBody>
@@ -3335,7 +3331,7 @@
                 </a:solidFill>
                 <a:latin typeface="Apple SD Gothic Neo"/>
               </a:rPr>
-              <a:t>업체 직원이 찍는 손상 사진과 고객이 찍는 사진, 둘 다 '언제 어디서 찍은 원본인지'를 제3자가 확인할 수 있게 만듭니다. 개발 연동 없이 시작하고 카모아 부담 비용은 없습니다.</a:t>
+              <a:t>업체가 찍는 손상 사진과 고객이 찍는 사진을 예약별 공동 사서함 한 곳에 모으고, '언제 어디서 찍은 원본인지'와 '상대가 그 사진을 확인했는지'까지 제3자가 볼 수 있게 만듭니다. 개발 연동 없이 시작하고 카모아 부담 비용은 없습니다.</a:t>
             </a:r>
           </a:p>
         </p:txBody>
@@ -3374,7 +3370,7 @@
                 </a:solidFill>
                 <a:latin typeface="Apple SD Gothic Neo"/>
               </a:rPr>
-              <a:t>2026년 9월 · SantaHades Co., Ltd. (용인) · 대표 손용석 · hi@ori.pics</a:t>
+              <a:t>2026년 9월 (개정 v2 · 사서함 기능 반영) · SantaHades Co., Ltd. (용인) · 대표 손용석 · hi@ori.pics</a:t>
             </a:r>
           </a:p>
         </p:txBody>
@@ -3388,6 +3384,639 @@
 </file>
 
 <file path=ppt/slides/slide10.xml><?xml version="1.0" encoding="utf-8"?>
+<p:sld xmlns:a="http://schemas.openxmlformats.org/drawingml/2006/main" xmlns:p="http://schemas.openxmlformats.org/presentationml/2006/main" xmlns:r="http://schemas.openxmlformats.org/officeDocument/2006/relationships">
+  <p:cSld>
+    <p:spTree>
+      <p:nvGrpSpPr>
+        <p:cNvPr id="1" name=""/>
+        <p:cNvGrpSpPr/>
+        <p:nvPr/>
+      </p:nvGrpSpPr>
+      <p:grpSpPr/>
+      <p:sp>
+        <p:nvSpPr>
+          <p:cNvPr id="2" name="Rectangle 1"/>
+          <p:cNvSpPr/>
+          <p:nvPr/>
+        </p:nvSpPr>
+        <p:spPr>
+          <a:xfrm>
+            <a:off x="0" y="0"/>
+            <a:ext cx="12191695" cy="109728"/>
+          </a:xfrm>
+          <a:prstGeom prst="rect">
+            <a:avLst/>
+          </a:prstGeom>
+          <a:solidFill>
+            <a:srgbClr val="1D4ED8"/>
+          </a:solidFill>
+          <a:ln>
+            <a:noFill/>
+          </a:ln>
+        </p:spPr>
+        <p:style>
+          <a:lnRef idx="1">
+            <a:schemeClr val="accent1"/>
+          </a:lnRef>
+          <a:fillRef idx="3">
+            <a:schemeClr val="accent1"/>
+          </a:fillRef>
+          <a:effectRef idx="2">
+            <a:schemeClr val="accent1"/>
+          </a:effectRef>
+          <a:fontRef idx="minor">
+            <a:schemeClr val="lt1"/>
+          </a:fontRef>
+        </p:style>
+        <p:txBody>
+          <a:bodyPr rtlCol="0" anchor="ctr"/>
+          <a:lstStyle/>
+          <a:p>
+            <a:pPr algn="ctr"/>
+          </a:p>
+        </p:txBody>
+      </p:sp>
+      <p:sp>
+        <p:nvSpPr>
+          <p:cNvPr id="3" name="TextBox 2"/>
+          <p:cNvSpPr txBox="1"/>
+          <p:nvPr/>
+        </p:nvSpPr>
+        <p:spPr>
+          <a:xfrm>
+            <a:off x="548640" y="320040"/>
+            <a:ext cx="9144000" cy="320040"/>
+          </a:xfrm>
+          <a:prstGeom prst="rect">
+            <a:avLst/>
+          </a:prstGeom>
+          <a:noFill/>
+        </p:spPr>
+        <p:txBody>
+          <a:bodyPr wrap="square" anchor="t" lIns="45720" rIns="45720" tIns="27432" bIns="27432">
+            <a:spAutoFit/>
+          </a:bodyPr>
+          <a:lstStyle/>
+          <a:p>
+            <a:pPr algn="l">
+              <a:lnSpc>
+                <a:spcPct val="115000"/>
+              </a:lnSpc>
+            </a:pPr>
+            <a:r>
+              <a:rPr sz="1100" b="1">
+                <a:solidFill>
+                  <a:srgbClr val="1D4ED8"/>
+                </a:solidFill>
+                <a:latin typeface="Apple SD Gothic Neo"/>
+              </a:rPr>
+              <a:t>PHASE 2 &amp; PRICING</a:t>
+            </a:r>
+          </a:p>
+        </p:txBody>
+      </p:sp>
+      <p:sp>
+        <p:nvSpPr>
+          <p:cNvPr id="4" name="TextBox 3"/>
+          <p:cNvSpPr txBox="1"/>
+          <p:nvPr/>
+        </p:nvSpPr>
+        <p:spPr>
+          <a:xfrm>
+            <a:off x="548640" y="594360"/>
+            <a:ext cx="11064240" cy="731520"/>
+          </a:xfrm>
+          <a:prstGeom prst="rect">
+            <a:avLst/>
+          </a:prstGeom>
+          <a:noFill/>
+        </p:spPr>
+        <p:txBody>
+          <a:bodyPr wrap="square" anchor="t" lIns="45720" rIns="45720" tIns="27432" bIns="27432">
+            <a:spAutoFit/>
+          </a:bodyPr>
+          <a:lstStyle/>
+          <a:p>
+            <a:pPr algn="l">
+              <a:lnSpc>
+                <a:spcPct val="115000"/>
+              </a:lnSpc>
+            </a:pPr>
+            <a:r>
+              <a:rPr sz="2800" b="1">
+                <a:solidFill>
+                  <a:srgbClr val="0F172A"/>
+                </a:solidFill>
+                <a:latin typeface="Apple SD Gothic Neo"/>
+              </a:rPr>
+              <a:t>2단계 연동 옵션과 요금 모델</a:t>
+            </a:r>
+          </a:p>
+        </p:txBody>
+      </p:sp>
+      <p:sp>
+        <p:nvSpPr>
+          <p:cNvPr id="5" name="TextBox 4"/>
+          <p:cNvSpPr txBox="1"/>
+          <p:nvPr/>
+        </p:nvSpPr>
+        <p:spPr>
+          <a:xfrm>
+            <a:off x="548640" y="6400800"/>
+            <a:ext cx="10972800" cy="274320"/>
+          </a:xfrm>
+          <a:prstGeom prst="rect">
+            <a:avLst/>
+          </a:prstGeom>
+          <a:noFill/>
+        </p:spPr>
+        <p:txBody>
+          <a:bodyPr wrap="square" anchor="t" lIns="45720" rIns="45720" tIns="27432" bIns="27432">
+            <a:spAutoFit/>
+          </a:bodyPr>
+          <a:lstStyle/>
+          <a:p>
+            <a:pPr algn="l">
+              <a:lnSpc>
+                <a:spcPct val="115000"/>
+              </a:lnSpc>
+            </a:pPr>
+            <a:r>
+              <a:rPr sz="900" b="0">
+                <a:solidFill>
+                  <a:srgbClr val="475569"/>
+                </a:solidFill>
+                <a:latin typeface="Apple SD Gothic Neo"/>
+              </a:rPr>
+              <a:t>OriPics · SantaHades Co., Ltd. · hi@ori.pics · ori.pics — 국제 표준 C2PA 적합성 인증 제품</a:t>
+            </a:r>
+          </a:p>
+        </p:txBody>
+      </p:sp>
+      <p:sp>
+        <p:nvSpPr>
+          <p:cNvPr id="6" name="Rounded Rectangle 5"/>
+          <p:cNvSpPr/>
+          <p:nvPr/>
+        </p:nvSpPr>
+        <p:spPr>
+          <a:xfrm>
+            <a:off x="548640" y="1554480"/>
+            <a:ext cx="5394960" cy="2651760"/>
+          </a:xfrm>
+          <a:prstGeom prst="roundRect">
+            <a:avLst>
+              <a:gd name="adj" fmla="val 8000"/>
+            </a:avLst>
+          </a:prstGeom>
+          <a:solidFill>
+            <a:srgbClr val="FFFFFF"/>
+          </a:solidFill>
+          <a:ln w="9525">
+            <a:solidFill>
+              <a:srgbClr val="E2E8F0"/>
+            </a:solidFill>
+          </a:ln>
+          <a:effectLst/>
+        </p:spPr>
+        <p:style>
+          <a:lnRef idx="1">
+            <a:schemeClr val="accent1"/>
+          </a:lnRef>
+          <a:fillRef idx="3">
+            <a:schemeClr val="accent1"/>
+          </a:fillRef>
+          <a:effectRef idx="2">
+            <a:schemeClr val="accent1"/>
+          </a:effectRef>
+          <a:fontRef idx="minor">
+            <a:schemeClr val="lt1"/>
+          </a:fontRef>
+        </p:style>
+        <p:txBody>
+          <a:bodyPr rtlCol="0" anchor="ctr"/>
+          <a:lstStyle/>
+          <a:p>
+            <a:pPr algn="ctr"/>
+          </a:p>
+        </p:txBody>
+      </p:sp>
+      <p:sp>
+        <p:nvSpPr>
+          <p:cNvPr id="7" name="TextBox 6"/>
+          <p:cNvSpPr txBox="1"/>
+          <p:nvPr/>
+        </p:nvSpPr>
+        <p:spPr>
+          <a:xfrm>
+            <a:off x="685800" y="1645920"/>
+            <a:ext cx="5120640" cy="411480"/>
+          </a:xfrm>
+          <a:prstGeom prst="rect">
+            <a:avLst/>
+          </a:prstGeom>
+          <a:noFill/>
+        </p:spPr>
+        <p:txBody>
+          <a:bodyPr wrap="square" anchor="t" lIns="45720" rIns="45720" tIns="27432" bIns="27432">
+            <a:spAutoFit/>
+          </a:bodyPr>
+          <a:lstStyle/>
+          <a:p>
+            <a:pPr algn="l">
+              <a:lnSpc>
+                <a:spcPct val="115000"/>
+              </a:lnSpc>
+            </a:pPr>
+            <a:r>
+              <a:rPr sz="1500" b="1">
+                <a:solidFill>
+                  <a:srgbClr val="0F172A"/>
+                </a:solidFill>
+                <a:latin typeface="Apple SD Gothic Neo"/>
+              </a:rPr>
+              <a:t>2단계 연동 (파일럿 결과 후, 카모아 선택)</a:t>
+            </a:r>
+          </a:p>
+        </p:txBody>
+      </p:sp>
+      <p:sp>
+        <p:nvSpPr>
+          <p:cNvPr id="8" name="TextBox 7"/>
+          <p:cNvSpPr txBox="1"/>
+          <p:nvPr/>
+        </p:nvSpPr>
+        <p:spPr>
+          <a:xfrm>
+            <a:off x="685800" y="2057400"/>
+            <a:ext cx="5120640" cy="2057400"/>
+          </a:xfrm>
+          <a:prstGeom prst="rect">
+            <a:avLst/>
+          </a:prstGeom>
+          <a:noFill/>
+        </p:spPr>
+        <p:txBody>
+          <a:bodyPr wrap="square" anchor="t" lIns="45720" rIns="45720" tIns="27432" bIns="27432">
+            <a:spAutoFit/>
+          </a:bodyPr>
+          <a:lstStyle/>
+          <a:p>
+            <a:pPr algn="l">
+              <a:lnSpc>
+                <a:spcPct val="120000"/>
+              </a:lnSpc>
+            </a:pPr>
+            <a:r>
+              <a:rPr sz="1300" b="0">
+                <a:solidFill>
+                  <a:srgbClr val="475569"/>
+                </a:solidFill>
+                <a:latin typeface="Apple SD Gothic Neo"/>
+              </a:rPr>
+              <a:t>• 예약 생성 시 API로 사서함 자동 개설(이름=예약번호) + 예약 확정 알림톡에 고객 초대 링크 자동 삽입</a:t>
+            </a:r>
+          </a:p>
+          <a:p>
+            <a:pPr algn="l"/>
+            <a:r>
+              <a:rPr sz="1300" b="0">
+                <a:solidFill>
+                  <a:srgbClr val="475569"/>
+                </a:solidFill>
+              </a:rPr>
+              <a:t>• 카모아 CS 공용 계정 자동 초대 → CS 도구에서 사서함 웹 열람·확인서 PDF 바로 열기</a:t>
+            </a:r>
+          </a:p>
+          <a:p>
+            <a:pPr algn="l"/>
+            <a:r>
+              <a:rPr sz="1300" b="0">
+                <a:solidFill>
+                  <a:srgbClr val="475569"/>
+                </a:solidFill>
+              </a:rPr>
+              <a:t>• 카모아 앱 예약 상세에 '인수·반납 사서함' 버튼 → 고객이 앱 안에서 확인·촬영</a:t>
+            </a:r>
+          </a:p>
+          <a:p>
+            <a:pPr algn="l"/>
+            <a:r>
+              <a:rPr sz="1300" b="0">
+                <a:solidFill>
+                  <a:srgbClr val="475569"/>
+                </a:solidFill>
+              </a:rPr>
+              <a:t>• 파트너스 ERP 손상 사진 항목에 사서함 링크 필드</a:t>
+            </a:r>
+          </a:p>
+        </p:txBody>
+      </p:sp>
+      <p:sp>
+        <p:nvSpPr>
+          <p:cNvPr id="9" name="Rounded Rectangle 8"/>
+          <p:cNvSpPr/>
+          <p:nvPr/>
+        </p:nvSpPr>
+        <p:spPr>
+          <a:xfrm>
+            <a:off x="6217920" y="1554480"/>
+            <a:ext cx="5394960" cy="2651760"/>
+          </a:xfrm>
+          <a:prstGeom prst="roundRect">
+            <a:avLst>
+              <a:gd name="adj" fmla="val 8000"/>
+            </a:avLst>
+          </a:prstGeom>
+          <a:solidFill>
+            <a:srgbClr val="EFF6FF"/>
+          </a:solidFill>
+          <a:ln w="9525">
+            <a:solidFill>
+              <a:srgbClr val="E2E8F0"/>
+            </a:solidFill>
+          </a:ln>
+          <a:effectLst/>
+        </p:spPr>
+        <p:style>
+          <a:lnRef idx="1">
+            <a:schemeClr val="accent1"/>
+          </a:lnRef>
+          <a:fillRef idx="3">
+            <a:schemeClr val="accent1"/>
+          </a:fillRef>
+          <a:effectRef idx="2">
+            <a:schemeClr val="accent1"/>
+          </a:effectRef>
+          <a:fontRef idx="minor">
+            <a:schemeClr val="lt1"/>
+          </a:fontRef>
+        </p:style>
+        <p:txBody>
+          <a:bodyPr rtlCol="0" anchor="ctr"/>
+          <a:lstStyle/>
+          <a:p>
+            <a:pPr algn="ctr"/>
+          </a:p>
+        </p:txBody>
+      </p:sp>
+      <p:sp>
+        <p:nvSpPr>
+          <p:cNvPr id="10" name="TextBox 9"/>
+          <p:cNvSpPr txBox="1"/>
+          <p:nvPr/>
+        </p:nvSpPr>
+        <p:spPr>
+          <a:xfrm>
+            <a:off x="6355080" y="1645920"/>
+            <a:ext cx="5120640" cy="411480"/>
+          </a:xfrm>
+          <a:prstGeom prst="rect">
+            <a:avLst/>
+          </a:prstGeom>
+          <a:noFill/>
+        </p:spPr>
+        <p:txBody>
+          <a:bodyPr wrap="square" anchor="t" lIns="45720" rIns="45720" tIns="27432" bIns="27432">
+            <a:spAutoFit/>
+          </a:bodyPr>
+          <a:lstStyle/>
+          <a:p>
+            <a:pPr algn="l">
+              <a:lnSpc>
+                <a:spcPct val="115000"/>
+              </a:lnSpc>
+            </a:pPr>
+            <a:r>
+              <a:rPr sz="1500" b="1">
+                <a:solidFill>
+                  <a:srgbClr val="1D4ED8"/>
+                </a:solidFill>
+                <a:latin typeface="Apple SD Gothic Neo"/>
+              </a:rPr>
+              <a:t>요금 모델 (파일럿 종료 후)</a:t>
+            </a:r>
+          </a:p>
+        </p:txBody>
+      </p:sp>
+      <p:sp>
+        <p:nvSpPr>
+          <p:cNvPr id="11" name="TextBox 10"/>
+          <p:cNvSpPr txBox="1"/>
+          <p:nvPr/>
+        </p:nvSpPr>
+        <p:spPr>
+          <a:xfrm>
+            <a:off x="6355080" y="2057400"/>
+            <a:ext cx="5120640" cy="2057400"/>
+          </a:xfrm>
+          <a:prstGeom prst="rect">
+            <a:avLst/>
+          </a:prstGeom>
+          <a:noFill/>
+        </p:spPr>
+        <p:txBody>
+          <a:bodyPr wrap="square" anchor="t" lIns="45720" rIns="45720" tIns="27432" bIns="27432">
+            <a:spAutoFit/>
+          </a:bodyPr>
+          <a:lstStyle/>
+          <a:p>
+            <a:pPr algn="l">
+              <a:lnSpc>
+                <a:spcPct val="120000"/>
+              </a:lnSpc>
+            </a:pPr>
+            <a:r>
+              <a:rPr sz="1300" b="0">
+                <a:solidFill>
+                  <a:srgbClr val="475569"/>
+                </a:solidFill>
+                <a:latin typeface="Apple SD Gothic Neo"/>
+              </a:rPr>
+              <a:t>• 파일럿 12주: 카모아·업체·고객 부담 0원</a:t>
+            </a:r>
+          </a:p>
+          <a:p>
+            <a:pPr algn="l"/>
+            <a:r>
+              <a:rPr sz="1300" b="0">
+                <a:solidFill>
+                  <a:srgbClr val="475569"/>
+                </a:solidFill>
+              </a:rPr>
+              <a:t>• 이후 업체 택1: 정액 월 99,000원(5계정·촬영 무제한·사서함 무제한) 또는 차량당 월 500원. 사서함 촬영은 개설자 부담이라 고객 무료</a:t>
+            </a:r>
+          </a:p>
+          <a:p>
+            <a:pPr algn="l"/>
+            <a:r>
+              <a:rPr sz="1300" b="0">
+                <a:solidFill>
+                  <a:srgbClr val="475569"/>
+                </a:solidFill>
+              </a:rPr>
+              <a:t>• 카모아가 배포·정산하면 파트너스 부가 서비스로 편입 가능</a:t>
+            </a:r>
+          </a:p>
+          <a:p>
+            <a:pPr algn="l"/>
+            <a:r>
+              <a:rPr sz="1300" b="0">
+                <a:solidFill>
+                  <a:srgbClr val="475569"/>
+                </a:solidFill>
+              </a:rPr>
+              <a:t>• 고객 개인이 별도로 쓰려면 원데이 패스 3,300원·Pro 9,900원 기존 상품 그대로</a:t>
+            </a:r>
+          </a:p>
+        </p:txBody>
+      </p:sp>
+      <p:sp>
+        <p:nvSpPr>
+          <p:cNvPr id="12" name="Rounded Rectangle 11"/>
+          <p:cNvSpPr/>
+          <p:nvPr/>
+        </p:nvSpPr>
+        <p:spPr>
+          <a:xfrm>
+            <a:off x="548640" y="4434840"/>
+            <a:ext cx="11064240" cy="1554480"/>
+          </a:xfrm>
+          <a:prstGeom prst="roundRect">
+            <a:avLst>
+              <a:gd name="adj" fmla="val 8000"/>
+            </a:avLst>
+          </a:prstGeom>
+          <a:solidFill>
+            <a:srgbClr val="FFFBEB"/>
+          </a:solidFill>
+          <a:ln w="9525">
+            <a:solidFill>
+              <a:srgbClr val="FDE68A"/>
+            </a:solidFill>
+          </a:ln>
+          <a:effectLst/>
+        </p:spPr>
+        <p:style>
+          <a:lnRef idx="1">
+            <a:schemeClr val="accent1"/>
+          </a:lnRef>
+          <a:fillRef idx="3">
+            <a:schemeClr val="accent1"/>
+          </a:fillRef>
+          <a:effectRef idx="2">
+            <a:schemeClr val="accent1"/>
+          </a:effectRef>
+          <a:fontRef idx="minor">
+            <a:schemeClr val="lt1"/>
+          </a:fontRef>
+        </p:style>
+        <p:txBody>
+          <a:bodyPr rtlCol="0" anchor="ctr"/>
+          <a:lstStyle/>
+          <a:p>
+            <a:pPr algn="ctr"/>
+          </a:p>
+        </p:txBody>
+      </p:sp>
+      <p:sp>
+        <p:nvSpPr>
+          <p:cNvPr id="13" name="TextBox 12"/>
+          <p:cNvSpPr txBox="1"/>
+          <p:nvPr/>
+        </p:nvSpPr>
+        <p:spPr>
+          <a:xfrm>
+            <a:off x="731520" y="4526280"/>
+            <a:ext cx="10789920" cy="365760"/>
+          </a:xfrm>
+          <a:prstGeom prst="rect">
+            <a:avLst/>
+          </a:prstGeom>
+          <a:noFill/>
+        </p:spPr>
+        <p:txBody>
+          <a:bodyPr wrap="square" anchor="t" lIns="45720" rIns="45720" tIns="27432" bIns="27432">
+            <a:spAutoFit/>
+          </a:bodyPr>
+          <a:lstStyle/>
+          <a:p>
+            <a:pPr algn="l">
+              <a:lnSpc>
+                <a:spcPct val="115000"/>
+              </a:lnSpc>
+            </a:pPr>
+            <a:r>
+              <a:rPr sz="1400" b="1">
+                <a:solidFill>
+                  <a:srgbClr val="B45309"/>
+                </a:solidFill>
+                <a:latin typeface="Apple SD Gothic Neo"/>
+              </a:rPr>
+              <a:t>준수 사항</a:t>
+            </a:r>
+          </a:p>
+        </p:txBody>
+      </p:sp>
+      <p:sp>
+        <p:nvSpPr>
+          <p:cNvPr id="14" name="TextBox 13"/>
+          <p:cNvSpPr txBox="1"/>
+          <p:nvPr/>
+        </p:nvSpPr>
+        <p:spPr>
+          <a:xfrm>
+            <a:off x="731520" y="4892040"/>
+            <a:ext cx="10789920" cy="1097280"/>
+          </a:xfrm>
+          <a:prstGeom prst="rect">
+            <a:avLst/>
+          </a:prstGeom>
+          <a:noFill/>
+        </p:spPr>
+        <p:txBody>
+          <a:bodyPr wrap="square" anchor="t" lIns="45720" rIns="45720" tIns="27432" bIns="27432">
+            <a:spAutoFit/>
+          </a:bodyPr>
+          <a:lstStyle/>
+          <a:p>
+            <a:pPr algn="l">
+              <a:lnSpc>
+                <a:spcPct val="125000"/>
+              </a:lnSpc>
+            </a:pPr>
+            <a:r>
+              <a:rPr sz="1200" b="0">
+                <a:solidFill>
+                  <a:srgbClr val="475569"/>
+                </a:solidFill>
+                <a:latin typeface="Apple SD Gothic Neo"/>
+              </a:rPr>
+              <a:t>• 사서함 사진은 공개링크로 OriPics 서버에 보관되며 사서함 삭제(참여자 알림 후 7일 유예) 시 함께 삭제됩니다. 참여자는 삭제 전 웹 저장소로 백업할 수 있습니다. 차량번호·인물이 포함될 수 있으므로 고객 안내 문구에 보관·열람 범위(사서함 참여자)를 명시합니다.</a:t>
+            </a:r>
+          </a:p>
+          <a:p>
+            <a:pPr algn="l"/>
+            <a:r>
+              <a:rPr sz="1200" b="0">
+                <a:solidFill>
+                  <a:srgbClr val="475569"/>
+                </a:solidFill>
+              </a:rPr>
+              <a:t>• OriPics는 촬영 시각·위치·기기·원본 여부와 열람 기록을 증명하는 도구이며 증거 능력 인정은 심사 기관(보험사·법원)이 판단합니다. 촬영 시점 기기 검증은 앱 촬영분에 적용됩니다.</a:t>
+            </a:r>
+          </a:p>
+        </p:txBody>
+      </p:sp>
+    </p:spTree>
+  </p:cSld>
+  <p:clrMapOvr>
+    <a:masterClrMapping/>
+  </p:clrMapOvr>
+</p:sld>
+</file>
+
+<file path=ppt/slides/slide11.xml><?xml version="1.0" encoding="utf-8"?>
 <p:sld xmlns:a="http://schemas.openxmlformats.org/drawingml/2006/main" xmlns:p="http://schemas.openxmlformats.org/presentationml/2006/main" xmlns:r="http://schemas.openxmlformats.org/officeDocument/2006/relationships">
   <p:cSld>
     <p:spTree>
@@ -3683,7 +4312,7 @@
                           </a:solidFill>
                           <a:latin typeface="Apple SD Gothic Neo"/>
                         </a:rPr>
-                        <a:t>담당자 미팅 30분 → 사서함 개설(수신 메일 지정) → 파일럿 업체 10곳 선정, 직원 15분 온보딩(원격)</a:t>
+                        <a:t>담당자 미팅 30분 → 파일럿 업체 10곳 선정 → 직원 15분 온보딩(원격: 사서함 개설·QR 스탠드 인쇄·초대문 발송) → 카모아 CS 공용 계정 1개 생성</a:t>
                       </a:r>
                     </a:p>
                   </a:txBody>
@@ -3751,7 +4380,7 @@
                           </a:solidFill>
                           <a:latin typeface="Apple SD Gothic Neo"/>
                         </a:rPr>
-                        <a:t>인수·반납 검증 사진 접수 · 고객 링크 문자 · 월 1회 중간 점검(10분)</a:t>
+                        <a:t>예약별 사서함 운영 · 고객 초대·열람 · 반납 후 잠금 · 월 1회 중간 점검(10분) · 분쟁 건은 확인서 PDF로 대응</a:t>
                       </a:r>
                     </a:p>
                   </a:txBody>
@@ -3819,7 +4448,7 @@
                           </a:solidFill>
                           <a:latin typeface="Apple SD Gothic Neo"/>
                         </a:rPr>
-                        <a:t>접수 건수, 분쟁 발생·해결 소요 변화, 업체·고객 의견 → 확대·연동·중단 판단 자료 1장</a:t>
+                        <a:t>사서함 수, 고객 참여율·열람 완료율, 분쟁 발생·해결 소요 변화, PDF 활용 건수, 업체·고객 의견 → 확대·연동·중단 판단 자료 1장</a:t>
                       </a:r>
                     </a:p>
                   </a:txBody>
@@ -3981,51 +4610,47 @@
             </a:r>
           </a:p>
           <a:p>
-            <a:pPr algn="l">
-              <a:lnSpc>
-                <a:spcPct val="120000"/>
-              </a:lnSpc>
-            </a:pPr>
+            <a:pPr algn="l"/>
             <a:r>
               <a:rPr sz="1300" b="0">
                 <a:solidFill>
                   <a:srgbClr val="475569"/>
                 </a:solidFill>
-                <a:latin typeface="Apple SD Gothic Neo"/>
               </a:rPr>
               <a:t>② 파일럿 참여 업체 10곳 추천(제주 중심 권장)</a:t>
             </a:r>
           </a:p>
           <a:p>
-            <a:pPr algn="l">
-              <a:lnSpc>
-                <a:spcPct val="120000"/>
-              </a:lnSpc>
-            </a:pPr>
+            <a:pPr algn="l"/>
             <a:r>
               <a:rPr sz="1300" b="0">
                 <a:solidFill>
                   <a:srgbClr val="475569"/>
                 </a:solidFill>
-                <a:latin typeface="Apple SD Gothic Neo"/>
-              </a:rPr>
-              <a:t>③ 파트너스 공지 1회 + 예약 안내 문구 한 줄 검토</a:t>
-            </a:r>
-          </a:p>
-          <a:p>
-            <a:pPr algn="l">
-              <a:lnSpc>
-                <a:spcPct val="120000"/>
-              </a:lnSpc>
-            </a:pPr>
+              </a:rPr>
+              <a:t>③ 파트너스 공지 1회 + 예약 확정 안내에 '사서함 초대' 한 줄 검토</a:t>
+            </a:r>
+          </a:p>
+          <a:p>
+            <a:pPr algn="l"/>
             <a:r>
               <a:rPr sz="1300" b="0">
                 <a:solidFill>
                   <a:srgbClr val="475569"/>
                 </a:solidFill>
-                <a:latin typeface="Apple SD Gothic Neo"/>
-              </a:rPr>
-              <a:t>④ 파일럿 후 2단계 연동 여부 논의</a:t>
+              </a:rPr>
+              <a:t>④ 카모아 CS 공용 계정 1개(사서함 참여·웹 열람용)</a:t>
+            </a:r>
+          </a:p>
+          <a:p>
+            <a:pPr algn="l"/>
+            <a:r>
+              <a:rPr sz="1300" b="0">
+                <a:solidFill>
+                  <a:srgbClr val="475569"/>
+                </a:solidFill>
+              </a:rPr>
+              <a:t>⑤ 파일럿 후 2단계 연동 여부 논의</a:t>
             </a:r>
           </a:p>
         </p:txBody>
@@ -4145,59 +4770,44 @@
               </a:lnSpc>
             </a:pPr>
             <a:r>
-              <a:rPr sz="1300" b="0">
+              <a:rPr sz="1250" b="0">
                 <a:solidFill>
                   <a:srgbClr val="475569"/>
                 </a:solidFill>
                 <a:latin typeface="Apple SD Gothic Neo"/>
               </a:rPr>
-              <a:t>• 렌터카 직군 랜딩(ori.pics/for/rental-fleet) · 인수·반납 상태 확인서 PDF 양식</a:t>
-            </a:r>
-          </a:p>
-          <a:p>
-            <a:pPr algn="l">
-              <a:lnSpc>
-                <a:spcPct val="120000"/>
-              </a:lnSpc>
-            </a:pPr>
-            <a:r>
-              <a:rPr sz="1300" b="0">
+              <a:t>• 렌터카 직군 랜딩(ori.pics/for/rental-fleet) · 사서함 확인서 PDF 실물 샘플</a:t>
+            </a:r>
+          </a:p>
+          <a:p>
+            <a:pPr algn="l"/>
+            <a:r>
+              <a:rPr sz="1250" b="0">
                 <a:solidFill>
                   <a:srgbClr val="475569"/>
                 </a:solidFill>
-                <a:latin typeface="Apple SD Gothic Neo"/>
-              </a:rPr>
-              <a:t>• 업체 직원용 15분 교육 슬라이드 · 고객 안내 문구 초안</a:t>
-            </a:r>
-          </a:p>
-          <a:p>
-            <a:pPr algn="l">
-              <a:lnSpc>
-                <a:spcPct val="120000"/>
-              </a:lnSpc>
-            </a:pPr>
-            <a:r>
-              <a:rPr sz="1300" b="0">
+              </a:rPr>
+              <a:t>• 카운터 QR 스탠드 양식 · 고객 초대문(앱 자동 생성) · 업체 직원용 15분 교육 슬라이드</a:t>
+            </a:r>
+          </a:p>
+          <a:p>
+            <a:pPr algn="l"/>
+            <a:r>
+              <a:rPr sz="1250" b="0">
                 <a:solidFill>
                   <a:srgbClr val="475569"/>
                 </a:solidFill>
-                <a:latin typeface="Apple SD Gothic Neo"/>
               </a:rPr>
               <a:t>• C2PA 공식 적합 제품 목록 링크 · 검증 방법 FAQ</a:t>
             </a:r>
           </a:p>
           <a:p>
-            <a:pPr algn="l">
-              <a:lnSpc>
-                <a:spcPct val="120000"/>
-              </a:lnSpc>
-            </a:pPr>
-            <a:r>
-              <a:rPr sz="1300" b="0">
+            <a:pPr algn="l"/>
+            <a:r>
+              <a:rPr sz="1250" b="0">
                 <a:solidFill>
                   <a:srgbClr val="475569"/>
                 </a:solidFill>
-                <a:latin typeface="Apple SD Gothic Neo"/>
               </a:rPr>
               <a:t>• 연락: hi@ori.pics · SantaHades Co., Ltd.(용인) · 대표 손용석</a:t>
             </a:r>
@@ -4693,69 +5303,60 @@
                 </a:solidFill>
                 <a:latin typeface="Apple SD Gothic Neo"/>
               </a:rPr>
-              <a:t>• 파트너 코드: 제휴 업체 직원·고객에게 OriPics 첫 달 무료</a:t>
-            </a:r>
-          </a:p>
-          <a:p>
-            <a:pPr algn="l">
-              <a:lnSpc>
-                <a:spcPct val="120000"/>
-              </a:lnSpc>
-            </a:pPr>
+              <a:t>• 파트너 코드: 제휴 업체 직원 Pro 첫 달 무료 (고객은 무료 앱만 설치)</a:t>
+            </a:r>
+          </a:p>
+          <a:p>
+            <a:pPr algn="l"/>
             <a:r>
               <a:rPr sz="1300" b="0">
                 <a:solidFill>
                   <a:srgbClr val="475569"/>
                 </a:solidFill>
-                <a:latin typeface="Apple SD Gothic Neo"/>
-              </a:rPr>
-              <a:t>• 전용 사서함 '카모아 인수·반납 기록': 검증 사진이 업체·카모아 지정 메일로 도착</a:t>
-            </a:r>
-          </a:p>
-          <a:p>
-            <a:pPr algn="l">
-              <a:lnSpc>
-                <a:spcPct val="120000"/>
-              </a:lnSpc>
-            </a:pPr>
+              </a:rPr>
+              <a:t>• 예약별 공동 사서함: 업체가 개설 → 고객·카모아 CS를 초대코드/QR로 초대</a:t>
+            </a:r>
+          </a:p>
+          <a:p>
+            <a:pPr algn="l"/>
             <a:r>
               <a:rPr sz="1300" b="0">
                 <a:solidFill>
                   <a:srgbClr val="475569"/>
                 </a:solidFill>
-                <a:latin typeface="Apple SD Gothic Neo"/>
-              </a:rPr>
-              <a:t>• 인수·반납 사진에 촬영 시각·GPS·기기 검증·원본 판정이 픽셀에 새겨짐</a:t>
-            </a:r>
-          </a:p>
-          <a:p>
-            <a:pPr algn="l">
-              <a:lnSpc>
-                <a:spcPct val="120000"/>
-              </a:lnSpc>
-            </a:pPr>
+              </a:rPr>
+              <a:t>• 인수·반납 사진은 촬영 순간 시각·GPS·기기 검증·원본 판정이 자동, 촬영 건수는 업체 부담</a:t>
+            </a:r>
+          </a:p>
+          <a:p>
+            <a:pPr algn="l"/>
             <a:r>
               <a:rPr sz="1300" b="0">
                 <a:solidFill>
                   <a:srgbClr val="475569"/>
                 </a:solidFill>
-                <a:latin typeface="Apple SD Gothic Neo"/>
-              </a:rPr>
-              <a:t>• 고객·CS는 앱 없이 공개링크로 확인</a:t>
-            </a:r>
-          </a:p>
-          <a:p>
-            <a:pPr algn="l">
-              <a:lnSpc>
-                <a:spcPct val="120000"/>
-              </a:lnSpc>
-            </a:pPr>
+              </a:rPr>
+              <a:t>• 사진마다 '아직 안 본 참여자 수'가 표시되어 고객 확인 여부가 기록됨</a:t>
+            </a:r>
+          </a:p>
+          <a:p>
+            <a:pPr algn="l"/>
             <a:r>
               <a:rPr sz="1300" b="0">
                 <a:solidFill>
                   <a:srgbClr val="475569"/>
                 </a:solidFill>
-                <a:latin typeface="Apple SD Gothic Neo"/>
+              </a:rPr>
+              <a:t>• 사서함 사진은 삭제 불가(사후 조작 방지) · 확인서 PDF 즉시 발행 · CS는 웹에서 열람</a:t>
+            </a:r>
+          </a:p>
+          <a:p>
+            <a:pPr algn="l"/>
+            <a:r>
+              <a:rPr sz="1300" b="0">
+                <a:solidFill>
+                  <a:srgbClr val="475569"/>
+                </a:solidFill>
               </a:rPr>
               <a:t>• 12주 파일럿 10개 업체, 비용 전액 OriPics 부담</a:t>
             </a:r>
@@ -4883,87 +5484,62 @@
                 </a:solidFill>
                 <a:latin typeface="Apple SD Gothic Neo"/>
               </a:rPr>
-              <a:t>• 분쟁 중재가 '링크 두 개 열어 보기'로 끝남 → CS 비용 감소</a:t>
-            </a:r>
-          </a:p>
-          <a:p>
-            <a:pPr algn="l">
-              <a:lnSpc>
-                <a:spcPct val="120000"/>
-              </a:lnSpc>
-            </a:pPr>
+              <a:t>• 분쟁 중재가 '사서함 하나 열어 보기'로 끝남 → CS 시간 감소</a:t>
+            </a:r>
+          </a:p>
+          <a:p>
+            <a:pPr algn="l"/>
             <a:r>
               <a:rPr sz="1300" b="0">
                 <a:solidFill>
                   <a:srgbClr val="475569"/>
                 </a:solidFill>
-                <a:latin typeface="Apple SD Gothic Neo"/>
-              </a:rPr>
-              <a:t>• 리뷰 신뢰 지표 개선 (분쟁 리뷰 감소)</a:t>
-            </a:r>
-          </a:p>
-          <a:p>
-            <a:pPr algn="l">
-              <a:lnSpc>
-                <a:spcPct val="120000"/>
-              </a:lnSpc>
-            </a:pPr>
+              </a:rPr>
+              <a:t>• '고객이 인수 사진을 확인했다'는 열람 기록 → 사후 '몰랐다' 분쟁 차단</a:t>
+            </a:r>
+          </a:p>
+          <a:p>
+            <a:pPr algn="l"/>
             <a:r>
               <a:rPr sz="1300" b="0">
                 <a:solidFill>
                   <a:srgbClr val="475569"/>
                 </a:solidFill>
-                <a:latin typeface="Apple SD Gothic Neo"/>
-              </a:rPr>
-              <a:t>• 무료 ERP에 검증 기능 추가 → 600개 업체 락인 강화</a:t>
-            </a:r>
-          </a:p>
-          <a:p>
-            <a:pPr algn="l">
-              <a:lnSpc>
-                <a:spcPct val="120000"/>
-              </a:lnSpc>
-            </a:pPr>
+              </a:rPr>
+              <a:t>• 리뷰 신뢰 지표 개선 (흠집·과태료 분쟁 리뷰 감소)</a:t>
+            </a:r>
+          </a:p>
+          <a:p>
+            <a:pPr algn="l"/>
             <a:r>
               <a:rPr sz="1300" b="0">
                 <a:solidFill>
                   <a:srgbClr val="475569"/>
                 </a:solidFill>
-                <a:latin typeface="Apple SD Gothic Neo"/>
-              </a:rPr>
-              <a:t>• 과태료 전가 근거 확보 (서울 적발 1위 업종=렌터카)</a:t>
-            </a:r>
-          </a:p>
-          <a:p>
-            <a:pPr algn="l">
-              <a:lnSpc>
-                <a:spcPct val="120000"/>
-              </a:lnSpc>
-            </a:pPr>
+              </a:rPr>
+              <a:t>• 무료 ERP에 검증·공유 기능 추가 → 600개 업체 락인 강화</a:t>
+            </a:r>
+          </a:p>
+          <a:p>
+            <a:pPr algn="l"/>
             <a:r>
               <a:rPr sz="1300" b="0">
                 <a:solidFill>
                   <a:srgbClr val="475569"/>
                 </a:solidFill>
-                <a:latin typeface="Apple SD Gothic Neo"/>
+              </a:rPr>
+              <a:t>• 확인서 PDF로 보험·과태료 소명 근거 확보 (서울 적발 1위 업종=렌터카)</a:t>
+            </a:r>
+          </a:p>
+          <a:p>
+            <a:pPr algn="l"/>
+            <a:r>
+              <a:rPr sz="1300" b="0">
+                <a:solidFill>
+                  <a:srgbClr val="475569"/>
+                </a:solidFill>
               </a:rPr>
               <a:t>• 'C2PA 적합성 인증 제품 채택 첫 렌터카 플랫폼' 보도 소재</a:t>
-            </a:r>
-          </a:p>
-          <a:p>
-            <a:pPr algn="l">
-              <a:lnSpc>
-                <a:spcPct val="120000"/>
-              </a:lnSpc>
-            </a:pPr>
-            <a:r>
-              <a:rPr sz="1300" b="0">
-                <a:solidFill>
-                  <a:srgbClr val="475569"/>
-                </a:solidFill>
-                <a:latin typeface="Apple SD Gothic Neo"/>
-              </a:rPr>
-              <a:t>• 해외 SaaS 진출에도 동일 적용</a:t>
             </a:r>
           </a:p>
         </p:txBody>
@@ -7882,7 +8458,7 @@
                 </a:solidFill>
                 <a:latin typeface="Apple SD Gothic Neo"/>
               </a:rPr>
-              <a:t>PROPOSAL · PHASE 1</a:t>
+              <a:t>SHARED MAILBOX</a:t>
             </a:r>
           </a:p>
         </p:txBody>
@@ -7921,7 +8497,7 @@
                 </a:solidFill>
                 <a:latin typeface="Apple SD Gothic Neo"/>
               </a:rPr>
-              <a:t>1단계 — 개발 연동 없이, 파트너 코드와 전용 사서함으로 시작</a:t>
+              <a:t>공동 사서함 — 인수·반납 기록을 업체·고객·카모아가 한 곳에서</a:t>
             </a:r>
           </a:p>
         </p:txBody>
@@ -7974,7 +8550,7 @@
         <p:spPr>
           <a:xfrm>
             <a:off x="548640" y="1554480"/>
-            <a:ext cx="5394960" cy="2103120"/>
+            <a:ext cx="5394960" cy="1783080"/>
           </a:xfrm>
           <a:prstGeom prst="roundRect">
             <a:avLst>
@@ -8047,7 +8623,7 @@
                 </a:solidFill>
                 <a:latin typeface="Apple SD Gothic Neo"/>
               </a:rPr>
-              <a:t>파트너 코드</a:t>
+              <a:t>예약별 사서함 · 초대코드/QR</a:t>
             </a:r>
           </a:p>
         </p:txBody>
@@ -8061,7 +8637,7 @@
         <p:spPr>
           <a:xfrm>
             <a:off x="685800" y="2057400"/>
-            <a:ext cx="5120640" cy="1508760"/>
+            <a:ext cx="5120640" cy="1188720"/>
           </a:xfrm>
           <a:prstGeom prst="rect">
             <a:avLst/>
@@ -8086,39 +8662,7 @@
                 </a:solidFill>
                 <a:latin typeface="Apple SD Gothic Neo"/>
               </a:rPr>
-              <a:t>• 카모아 파트너스 공지로 제휴 업체에 배포 → 직원 폰에 OriPics 설치·코드 등록(첫 달 Pro 무료)</a:t>
-            </a:r>
-          </a:p>
-          <a:p>
-            <a:pPr algn="l">
-              <a:lnSpc>
-                <a:spcPct val="120000"/>
-              </a:lnSpc>
-            </a:pPr>
-            <a:r>
-              <a:rPr sz="1300" b="0">
-                <a:solidFill>
-                  <a:srgbClr val="475569"/>
-                </a:solidFill>
-                <a:latin typeface="Apple SD Gothic Neo"/>
-              </a:rPr>
-              <a:t>• 예약 확정 안내에 고객용 코드 한 줄 → 고객도 검증 사진 촬영 가능</a:t>
-            </a:r>
-          </a:p>
-          <a:p>
-            <a:pPr algn="l">
-              <a:lnSpc>
-                <a:spcPct val="120000"/>
-              </a:lnSpc>
-            </a:pPr>
-            <a:r>
-              <a:rPr sz="1300" b="0">
-                <a:solidFill>
-                  <a:srgbClr val="475569"/>
-                </a:solidFill>
-                <a:latin typeface="Apple SD Gothic Neo"/>
-              </a:rPr>
-              <a:t>• 비용: 파일럿 기간 전액 OriPics 부담</a:t>
+              <a:t>업체 직원이 예약(차량)별로 개설. 고객은 카운터 QR 또는 문자 초대문으로 참여 — 1회용 코드, 이름·역할은 업체가 지정(수정 불가). 카모아 CS도 참여자로 초대</a:t>
             </a:r>
           </a:p>
         </p:txBody>
@@ -8132,7 +8676,7 @@
         <p:spPr>
           <a:xfrm>
             <a:off x="6217920" y="1554480"/>
-            <a:ext cx="5394960" cy="2103120"/>
+            <a:ext cx="5394960" cy="1783080"/>
           </a:xfrm>
           <a:prstGeom prst="roundRect">
             <a:avLst>
@@ -8140,7 +8684,7 @@
             </a:avLst>
           </a:prstGeom>
           <a:solidFill>
-            <a:srgbClr val="EFF6FF"/>
+            <a:srgbClr val="FFFFFF"/>
           </a:solidFill>
           <a:ln w="9525">
             <a:solidFill>
@@ -8201,11 +8745,11 @@
             <a:r>
               <a:rPr sz="1500" b="1">
                 <a:solidFill>
-                  <a:srgbClr val="1D4ED8"/>
-                </a:solidFill>
-                <a:latin typeface="Apple SD Gothic Neo"/>
-              </a:rPr>
-              <a:t>전용 비공개 사서함 '카모아 인수·반납 기록'</a:t>
+                  <a:srgbClr val="0F172A"/>
+                </a:solidFill>
+                <a:latin typeface="Apple SD Gothic Neo"/>
+              </a:rPr>
+              <a:t>참여자 촬영 = 자동 인증, 건수는 업체 부담</a:t>
             </a:r>
           </a:p>
         </p:txBody>
@@ -8219,7 +8763,7 @@
         <p:spPr>
           <a:xfrm>
             <a:off x="6355080" y="2057400"/>
-            <a:ext cx="5120640" cy="1508760"/>
+            <a:ext cx="5120640" cy="1188720"/>
           </a:xfrm>
           <a:prstGeom prst="rect">
             <a:avLst/>
@@ -8244,39 +8788,7 @@
                 </a:solidFill>
                 <a:latin typeface="Apple SD Gothic Neo"/>
               </a:rPr>
-              <a:t>• 업체 직원이 앱 제출탭에서 사서함 선택 → 사진이 기기에서 업체 메일·카모아 지정 메일로 직접 전송(제목에 예약 번호)</a:t>
-            </a:r>
-          </a:p>
-          <a:p>
-            <a:pPr algn="l">
-              <a:lnSpc>
-                <a:spcPct val="120000"/>
-              </a:lnSpc>
-            </a:pPr>
-            <a:r>
-              <a:rPr sz="1300" b="0">
-                <a:solidFill>
-                  <a:srgbClr val="475569"/>
-                </a:solidFill>
-                <a:latin typeface="Apple SD Gothic Neo"/>
-              </a:rPr>
-              <a:t>• OriPics 서버는 공개링크 발행분만 보관, 미발행 사진 미보관</a:t>
-            </a:r>
-          </a:p>
-          <a:p>
-            <a:pPr algn="l">
-              <a:lnSpc>
-                <a:spcPct val="120000"/>
-              </a:lnSpc>
-            </a:pPr>
-            <a:r>
-              <a:rPr sz="1300" b="0">
-                <a:solidFill>
-                  <a:srgbClr val="475569"/>
-                </a:solidFill>
-                <a:latin typeface="Apple SD Gothic Neo"/>
-              </a:rPr>
-              <a:t>• 사서함 개설·수신 메일 지정은 OriPics가 처리</a:t>
+              <a:t>사서함 안 [촬영하기]는 좌표·공개링크가 항상 포함되고 셔터 즉시 인증됩니다. 고객이 찍어도 차감은 업체(개설자) 건수 — 고객은 비용·가입 부담 없이 참여</a:t>
             </a:r>
           </a:p>
         </p:txBody>
@@ -8289,8 +8801,8 @@
         </p:nvSpPr>
         <p:spPr>
           <a:xfrm>
-            <a:off x="548640" y="3886200"/>
-            <a:ext cx="11064240" cy="2103120"/>
+            <a:off x="548640" y="3520440"/>
+            <a:ext cx="5394960" cy="1783080"/>
           </a:xfrm>
           <a:prstGeom prst="roundRect">
             <a:avLst>
@@ -8298,7 +8810,7 @@
             </a:avLst>
           </a:prstGeom>
           <a:solidFill>
-            <a:srgbClr val="F1F5F9"/>
+            <a:srgbClr val="FFFFFF"/>
           </a:solidFill>
           <a:ln w="9525">
             <a:solidFill>
@@ -8337,8 +8849,8 @@
         </p:nvSpPr>
         <p:spPr>
           <a:xfrm>
-            <a:off x="731520" y="3977639"/>
-            <a:ext cx="10789920" cy="365760"/>
+            <a:off x="685800" y="3611880"/>
+            <a:ext cx="5120640" cy="411480"/>
           </a:xfrm>
           <a:prstGeom prst="rect">
             <a:avLst/>
@@ -8357,13 +8869,13 @@
               </a:lnSpc>
             </a:pPr>
             <a:r>
-              <a:rPr sz="1400" b="1">
-                <a:solidFill>
-                  <a:srgbClr val="1D4ED8"/>
-                </a:solidFill>
-                <a:latin typeface="Apple SD Gothic Neo"/>
-              </a:rPr>
-              <a:t>기존 흐름은 그대로, 검증 사진만 추가됩니다</a:t>
+              <a:rPr sz="1500" b="1">
+                <a:solidFill>
+                  <a:srgbClr val="0F172A"/>
+                </a:solidFill>
+                <a:latin typeface="Apple SD Gothic Neo"/>
+              </a:rPr>
+              <a:t>열람 확인 · 삭제 잠금</a:t>
             </a:r>
           </a:p>
         </p:txBody>
@@ -8376,8 +8888,8 @@
         </p:nvSpPr>
         <p:spPr>
           <a:xfrm>
-            <a:off x="731520" y="4343400"/>
-            <a:ext cx="10789920" cy="1554480"/>
+            <a:off x="685800" y="4023360"/>
+            <a:ext cx="5120640" cy="1188720"/>
           </a:xfrm>
           <a:prstGeom prst="rect">
             <a:avLst/>
@@ -8392,7 +8904,7 @@
           <a:p>
             <a:pPr algn="l">
               <a:lnSpc>
-                <a:spcPct val="125000"/>
+                <a:spcPct val="120000"/>
               </a:lnSpc>
             </a:pPr>
             <a:r>
@@ -8402,13 +8914,123 @@
                 </a:solidFill>
                 <a:latin typeface="Apple SD Gothic Neo"/>
               </a:rPr>
-              <a:t>• 직원용 앱 손상 사진·전자계약서는 지금처럼 진행합니다. OriPics 촬영은 4면·손상 부위·계기판을 한 번 더 찍는 것으로, 장당 몇 초입니다.</a:t>
-            </a:r>
-          </a:p>
-          <a:p>
-            <a:pPr algn="l">
-              <a:lnSpc>
-                <a:spcPct val="125000"/>
+              <a:t>사진마다 '아직 안 본 참여자 수'(0도 표시)와 열람 시각이 남습니다. 사서함에 들어간 사진은 사서함이 삭제되기 전까지 누구도 삭제·철회 불가 → 사후 조작 논쟁이 사라짐</a:t>
+            </a:r>
+          </a:p>
+        </p:txBody>
+      </p:sp>
+      <p:sp>
+        <p:nvSpPr>
+          <p:cNvPr id="15" name="Rounded Rectangle 14"/>
+          <p:cNvSpPr/>
+          <p:nvPr/>
+        </p:nvSpPr>
+        <p:spPr>
+          <a:xfrm>
+            <a:off x="6217920" y="3520440"/>
+            <a:ext cx="5394960" cy="1783080"/>
+          </a:xfrm>
+          <a:prstGeom prst="roundRect">
+            <a:avLst>
+              <a:gd name="adj" fmla="val 8000"/>
+            </a:avLst>
+          </a:prstGeom>
+          <a:solidFill>
+            <a:srgbClr val="FFFFFF"/>
+          </a:solidFill>
+          <a:ln w="9525">
+            <a:solidFill>
+              <a:srgbClr val="E2E8F0"/>
+            </a:solidFill>
+          </a:ln>
+          <a:effectLst/>
+        </p:spPr>
+        <p:style>
+          <a:lnRef idx="1">
+            <a:schemeClr val="accent1"/>
+          </a:lnRef>
+          <a:fillRef idx="3">
+            <a:schemeClr val="accent1"/>
+          </a:fillRef>
+          <a:effectRef idx="2">
+            <a:schemeClr val="accent1"/>
+          </a:effectRef>
+          <a:fontRef idx="minor">
+            <a:schemeClr val="lt1"/>
+          </a:fontRef>
+        </p:style>
+        <p:txBody>
+          <a:bodyPr rtlCol="0" anchor="ctr"/>
+          <a:lstStyle/>
+          <a:p>
+            <a:pPr algn="ctr"/>
+          </a:p>
+        </p:txBody>
+      </p:sp>
+      <p:sp>
+        <p:nvSpPr>
+          <p:cNvPr id="16" name="TextBox 15"/>
+          <p:cNvSpPr txBox="1"/>
+          <p:nvPr/>
+        </p:nvSpPr>
+        <p:spPr>
+          <a:xfrm>
+            <a:off x="6355080" y="3611880"/>
+            <a:ext cx="5120640" cy="411480"/>
+          </a:xfrm>
+          <a:prstGeom prst="rect">
+            <a:avLst/>
+          </a:prstGeom>
+          <a:noFill/>
+        </p:spPr>
+        <p:txBody>
+          <a:bodyPr wrap="square" anchor="t" lIns="45720" rIns="45720" tIns="27432" bIns="27432">
+            <a:spAutoFit/>
+          </a:bodyPr>
+          <a:lstStyle/>
+          <a:p>
+            <a:pPr algn="l">
+              <a:lnSpc>
+                <a:spcPct val="115000"/>
+              </a:lnSpc>
+            </a:pPr>
+            <a:r>
+              <a:rPr sz="1500" b="1">
+                <a:solidFill>
+                  <a:srgbClr val="0F172A"/>
+                </a:solidFill>
+                <a:latin typeface="Apple SD Gothic Neo"/>
+              </a:rPr>
+              <a:t>확인서 PDF · 백업 · 웹 열람</a:t>
+            </a:r>
+          </a:p>
+        </p:txBody>
+      </p:sp>
+      <p:sp>
+        <p:nvSpPr>
+          <p:cNvPr id="17" name="TextBox 16"/>
+          <p:cNvSpPr txBox="1"/>
+          <p:nvPr/>
+        </p:nvSpPr>
+        <p:spPr>
+          <a:xfrm>
+            <a:off x="6355080" y="4023360"/>
+            <a:ext cx="5120640" cy="1188720"/>
+          </a:xfrm>
+          <a:prstGeom prst="rect">
+            <a:avLst/>
+          </a:prstGeom>
+          <a:noFill/>
+        </p:spPr>
+        <p:txBody>
+          <a:bodyPr wrap="square" anchor="t" lIns="45720" rIns="45720" tIns="27432" bIns="27432">
+            <a:spAutoFit/>
+          </a:bodyPr>
+          <a:lstStyle/>
+          <a:p>
+            <a:pPr algn="l">
+              <a:lnSpc>
+                <a:spcPct val="120000"/>
               </a:lnSpc>
             </a:pPr>
             <a:r>
@@ -8418,39 +9040,46 @@
                 </a:solidFill>
                 <a:latin typeface="Apple SD Gothic Neo"/>
               </a:rPr>
-              <a:t>• 공개 메모(100자)에 '앞 범퍼 좌측 기존 스크래치'처럼 적으면 링크에 함께 표시됩니다.</a:t>
-            </a:r>
-          </a:p>
-          <a:p>
-            <a:pPr algn="l">
-              <a:lnSpc>
-                <a:spcPct val="125000"/>
-              </a:lnSpc>
-            </a:pPr>
-            <a:r>
-              <a:rPr sz="1300" b="0">
+              <a:t>참여자 누구나 확인서 PDF(참여자 표·사진별 시각·좌표·등급·QR·미열람 수) 발행과 웹 저장소 백업 가능. 카모아 CS는 앱 없이 웹(ori.pics/mailboxes)에서 실시간 열람. 반납 후 '잠금'으로 읽기 전용 보존</a:t>
+            </a:r>
+          </a:p>
+        </p:txBody>
+      </p:sp>
+      <p:sp>
+        <p:nvSpPr>
+          <p:cNvPr id="18" name="TextBox 17"/>
+          <p:cNvSpPr txBox="1"/>
+          <p:nvPr/>
+        </p:nvSpPr>
+        <p:spPr>
+          <a:xfrm>
+            <a:off x="548640" y="5577840"/>
+            <a:ext cx="11064240" cy="548640"/>
+          </a:xfrm>
+          <a:prstGeom prst="rect">
+            <a:avLst/>
+          </a:prstGeom>
+          <a:noFill/>
+        </p:spPr>
+        <p:txBody>
+          <a:bodyPr wrap="square" anchor="t" lIns="45720" rIns="45720" tIns="27432" bIns="27432">
+            <a:spAutoFit/>
+          </a:bodyPr>
+          <a:lstStyle/>
+          <a:p>
+            <a:pPr algn="l">
+              <a:lnSpc>
+                <a:spcPct val="115000"/>
+              </a:lnSpc>
+            </a:pPr>
+            <a:r>
+              <a:rPr sz="1100" b="0">
                 <a:solidFill>
                   <a:srgbClr val="475569"/>
                 </a:solidFill>
                 <a:latin typeface="Apple SD Gothic Neo"/>
               </a:rPr>
-              <a:t>• 고객에게는 인수 사진 링크를 문자로 보냅니다. 고객은 출발 전 본인 폰 브라우저에서 확인합니다.</a:t>
-            </a:r>
-          </a:p>
-          <a:p>
-            <a:pPr algn="l">
-              <a:lnSpc>
-                <a:spcPct val="125000"/>
-              </a:lnSpc>
-            </a:pPr>
-            <a:r>
-              <a:rPr sz="1300" b="0">
-                <a:solidFill>
-                  <a:srgbClr val="475569"/>
-                </a:solidFill>
-                <a:latin typeface="Apple SD Gothic Neo"/>
-              </a:rPr>
-              <a:t>• 카모아 CS는 분쟁 시 인수·반납 링크 두 개를 열어 시각·원본만 확인하면 됩니다.</a:t>
+              <a:t>※ 사서함 개설은 로그인 사용자 누구나. 무료 1개·참여자 20명, Pro 무제한·참여자 50명. 개설자 삭제 시 참여자 전원 알림 후 7일 유예, 그 사이 백업 가능. 담당자 교체는 '개설자 권한 이전'으로.</a:t>
             </a:r>
           </a:p>
         </p:txBody>
@@ -8550,7 +9179,7 @@
                 </a:solidFill>
                 <a:latin typeface="Apple SD Gothic Neo"/>
               </a:rPr>
-              <a:t>TO-BE</a:t>
+              <a:t>PROPOSAL · PHASE 1</a:t>
             </a:r>
           </a:p>
         </p:txBody>
@@ -8583,13 +9212,13 @@
               </a:lnSpc>
             </a:pPr>
             <a:r>
-              <a:rPr sz="2800" b="1">
+              <a:rPr sz="2550" b="1">
                 <a:solidFill>
                   <a:srgbClr val="0F172A"/>
                 </a:solidFill>
                 <a:latin typeface="Apple SD Gothic Neo"/>
               </a:rPr>
-              <a:t>제휴 후 — 인수에서 분쟁 판단까지</a:t>
+              <a:t>1단계 — 개발 연동 없이, 파트너 코드와 예약별 공동 사서함으로 시작</a:t>
             </a:r>
           </a:p>
         </p:txBody>
@@ -8642,7 +9271,7 @@
         <p:spPr>
           <a:xfrm>
             <a:off x="548640" y="1554480"/>
-            <a:ext cx="2148840" cy="2651760"/>
+            <a:ext cx="5394960" cy="2103120"/>
           </a:xfrm>
           <a:prstGeom prst="roundRect">
             <a:avLst>
@@ -8683,66 +9312,14 @@
       </p:sp>
       <p:sp>
         <p:nvSpPr>
-          <p:cNvPr id="7" name="Oval 6"/>
-          <p:cNvSpPr/>
-          <p:nvPr/>
-        </p:nvSpPr>
-        <p:spPr>
-          <a:xfrm>
-            <a:off x="685800" y="1691640"/>
-            <a:ext cx="329184" cy="329184"/>
-          </a:xfrm>
-          <a:prstGeom prst="ellipse">
-            <a:avLst/>
-          </a:prstGeom>
-          <a:solidFill>
-            <a:srgbClr val="1D4ED8"/>
-          </a:solidFill>
-          <a:ln>
-            <a:noFill/>
-          </a:ln>
-        </p:spPr>
-        <p:style>
-          <a:lnRef idx="1">
-            <a:schemeClr val="accent1"/>
-          </a:lnRef>
-          <a:fillRef idx="3">
-            <a:schemeClr val="accent1"/>
-          </a:fillRef>
-          <a:effectRef idx="2">
-            <a:schemeClr val="accent1"/>
-          </a:effectRef>
-          <a:fontRef idx="minor">
-            <a:schemeClr val="lt1"/>
-          </a:fontRef>
-        </p:style>
-        <p:txBody>
-          <a:bodyPr rtlCol="0" anchor="ctr" lIns="0" rIns="0" tIns="0" bIns="0"/>
-          <a:lstStyle/>
-          <a:p>
-            <a:pPr algn="ctr"/>
-            <a:r>
-              <a:rPr sz="1300" b="1">
-                <a:solidFill>
-                  <a:srgbClr val="FFFFFF"/>
-                </a:solidFill>
-                <a:latin typeface="Apple SD Gothic Neo"/>
-              </a:rPr>
-              <a:t>1</a:t>
-            </a:r>
-          </a:p>
-        </p:txBody>
-      </p:sp>
-      <p:sp>
-        <p:nvSpPr>
-          <p:cNvPr id="8" name="TextBox 7"/>
+          <p:cNvPr id="7" name="TextBox 6"/>
           <p:cNvSpPr txBox="1"/>
           <p:nvPr/>
         </p:nvSpPr>
         <p:spPr>
           <a:xfrm>
-            <a:off x="1097280" y="1673352"/>
-            <a:ext cx="1508760" cy="365760"/>
+            <a:off x="685800" y="1645920"/>
+            <a:ext cx="5120640" cy="411480"/>
           </a:xfrm>
           <a:prstGeom prst="rect">
             <a:avLst/>
@@ -8767,21 +9344,21 @@
                 </a:solidFill>
                 <a:latin typeface="Apple SD Gothic Neo"/>
               </a:rPr>
-              <a:t>코드 등록</a:t>
-            </a:r>
-          </a:p>
-        </p:txBody>
-      </p:sp>
-      <p:sp>
-        <p:nvSpPr>
-          <p:cNvPr id="9" name="TextBox 8"/>
+              <a:t>파트너 코드</a:t>
+            </a:r>
+          </a:p>
+        </p:txBody>
+      </p:sp>
+      <p:sp>
+        <p:nvSpPr>
+          <p:cNvPr id="8" name="TextBox 7"/>
           <p:cNvSpPr txBox="1"/>
           <p:nvPr/>
         </p:nvSpPr>
         <p:spPr>
           <a:xfrm>
-            <a:off x="685800" y="2148840"/>
-            <a:ext cx="1874520" cy="1965960"/>
+            <a:off x="685800" y="2057400"/>
+            <a:ext cx="5120640" cy="1508760"/>
           </a:xfrm>
           <a:prstGeom prst="rect">
             <a:avLst/>
@@ -8800,70 +9377,49 @@
               </a:lnSpc>
             </a:pPr>
             <a:r>
-              <a:rPr sz="1200" b="0">
+              <a:rPr sz="1300" b="0">
                 <a:solidFill>
                   <a:srgbClr val="475569"/>
                 </a:solidFill>
                 <a:latin typeface="Apple SD Gothic Neo"/>
               </a:rPr>
-              <a:t>파트너스 공지 → 업체 직원 폰에 OriPics 설치·코드 등록. 고객은 예약 안내의 코드</a:t>
-            </a:r>
-          </a:p>
-        </p:txBody>
-      </p:sp>
-      <p:sp>
-        <p:nvSpPr>
-          <p:cNvPr id="10" name="Right Arrow 9"/>
+              <a:t>• 카모아 파트너스 공지로 제휴 업체에 배포 → 직원 폰에 OriPics 설치·코드 등록(첫 달 Pro 무료, 사서함 무제한)</a:t>
+            </a:r>
+          </a:p>
+          <a:p>
+            <a:pPr algn="l"/>
+            <a:r>
+              <a:rPr sz="1300" b="0">
+                <a:solidFill>
+                  <a:srgbClr val="475569"/>
+                </a:solidFill>
+              </a:rPr>
+              <a:t>• 고객은 무료 앱 설치·로그인만 — 촬영 건수는 업체(개설자) 부담이라 고객 비용 0</a:t>
+            </a:r>
+          </a:p>
+          <a:p>
+            <a:pPr algn="l"/>
+            <a:r>
+              <a:rPr sz="1300" b="0">
+                <a:solidFill>
+                  <a:srgbClr val="475569"/>
+                </a:solidFill>
+              </a:rPr>
+              <a:t>• 비용: 파일럿 기간 업체 Pro 요금까지 전액 OriPics 부담</a:t>
+            </a:r>
+          </a:p>
+        </p:txBody>
+      </p:sp>
+      <p:sp>
+        <p:nvSpPr>
+          <p:cNvPr id="9" name="Rounded Rectangle 8"/>
           <p:cNvSpPr/>
           <p:nvPr/>
         </p:nvSpPr>
         <p:spPr>
           <a:xfrm>
-            <a:off x="2715768" y="2770632"/>
-            <a:ext cx="182880" cy="219456"/>
-          </a:xfrm>
-          <a:prstGeom prst="rightArrow">
-            <a:avLst/>
-          </a:prstGeom>
-          <a:solidFill>
-            <a:srgbClr val="E2E8F0"/>
-          </a:solidFill>
-          <a:ln>
-            <a:noFill/>
-          </a:ln>
-        </p:spPr>
-        <p:style>
-          <a:lnRef idx="1">
-            <a:schemeClr val="accent1"/>
-          </a:lnRef>
-          <a:fillRef idx="3">
-            <a:schemeClr val="accent1"/>
-          </a:fillRef>
-          <a:effectRef idx="2">
-            <a:schemeClr val="accent1"/>
-          </a:effectRef>
-          <a:fontRef idx="minor">
-            <a:schemeClr val="lt1"/>
-          </a:fontRef>
-        </p:style>
-        <p:txBody>
-          <a:bodyPr rtlCol="0" anchor="ctr"/>
-          <a:lstStyle/>
-          <a:p>
-            <a:pPr algn="ctr"/>
-          </a:p>
-        </p:txBody>
-      </p:sp>
-      <p:sp>
-        <p:nvSpPr>
-          <p:cNvPr id="11" name="Rounded Rectangle 10"/>
-          <p:cNvSpPr/>
-          <p:nvPr/>
-        </p:nvSpPr>
-        <p:spPr>
-          <a:xfrm>
-            <a:off x="2916936" y="1554480"/>
-            <a:ext cx="2148840" cy="2651760"/>
+            <a:off x="6217920" y="1554480"/>
+            <a:ext cx="5394960" cy="2103120"/>
           </a:xfrm>
           <a:prstGeom prst="roundRect">
             <a:avLst>
@@ -8871,7 +9427,7 @@
             </a:avLst>
           </a:prstGeom>
           <a:solidFill>
-            <a:srgbClr val="FFFFFF"/>
+            <a:srgbClr val="EFF6FF"/>
           </a:solidFill>
           <a:ln w="9525">
             <a:solidFill>
@@ -8904,66 +9460,14 @@
       </p:sp>
       <p:sp>
         <p:nvSpPr>
-          <p:cNvPr id="12" name="Oval 11"/>
-          <p:cNvSpPr/>
-          <p:nvPr/>
-        </p:nvSpPr>
-        <p:spPr>
-          <a:xfrm>
-            <a:off x="3054096" y="1691640"/>
-            <a:ext cx="329184" cy="329184"/>
-          </a:xfrm>
-          <a:prstGeom prst="ellipse">
-            <a:avLst/>
-          </a:prstGeom>
-          <a:solidFill>
-            <a:srgbClr val="1D4ED8"/>
-          </a:solidFill>
-          <a:ln>
-            <a:noFill/>
-          </a:ln>
-        </p:spPr>
-        <p:style>
-          <a:lnRef idx="1">
-            <a:schemeClr val="accent1"/>
-          </a:lnRef>
-          <a:fillRef idx="3">
-            <a:schemeClr val="accent1"/>
-          </a:fillRef>
-          <a:effectRef idx="2">
-            <a:schemeClr val="accent1"/>
-          </a:effectRef>
-          <a:fontRef idx="minor">
-            <a:schemeClr val="lt1"/>
-          </a:fontRef>
-        </p:style>
-        <p:txBody>
-          <a:bodyPr rtlCol="0" anchor="ctr" lIns="0" rIns="0" tIns="0" bIns="0"/>
-          <a:lstStyle/>
-          <a:p>
-            <a:pPr algn="ctr"/>
-            <a:r>
-              <a:rPr sz="1300" b="1">
-                <a:solidFill>
-                  <a:srgbClr val="FFFFFF"/>
-                </a:solidFill>
-                <a:latin typeface="Apple SD Gothic Neo"/>
-              </a:rPr>
-              <a:t>2</a:t>
-            </a:r>
-          </a:p>
-        </p:txBody>
-      </p:sp>
-      <p:sp>
-        <p:nvSpPr>
-          <p:cNvPr id="13" name="TextBox 12"/>
+          <p:cNvPr id="10" name="TextBox 9"/>
           <p:cNvSpPr txBox="1"/>
           <p:nvPr/>
         </p:nvSpPr>
         <p:spPr>
           <a:xfrm>
-            <a:off x="3465576" y="1673352"/>
-            <a:ext cx="1508760" cy="365760"/>
+            <a:off x="6355080" y="1645920"/>
+            <a:ext cx="5120640" cy="411480"/>
           </a:xfrm>
           <a:prstGeom prst="rect">
             <a:avLst/>
@@ -8984,25 +9488,25 @@
             <a:r>
               <a:rPr sz="1500" b="1">
                 <a:solidFill>
-                  <a:srgbClr val="0F172A"/>
-                </a:solidFill>
-                <a:latin typeface="Apple SD Gothic Neo"/>
-              </a:rPr>
-              <a:t>인수 촬영</a:t>
-            </a:r>
-          </a:p>
-        </p:txBody>
-      </p:sp>
-      <p:sp>
-        <p:nvSpPr>
-          <p:cNvPr id="14" name="TextBox 13"/>
+                  <a:srgbClr val="1D4ED8"/>
+                </a:solidFill>
+                <a:latin typeface="Apple SD Gothic Neo"/>
+              </a:rPr>
+              <a:t>예약별 공동 사서함 (이름 = 예약번호·차량번호)</a:t>
+            </a:r>
+          </a:p>
+        </p:txBody>
+      </p:sp>
+      <p:sp>
+        <p:nvSpPr>
+          <p:cNvPr id="11" name="TextBox 10"/>
           <p:cNvSpPr txBox="1"/>
           <p:nvPr/>
         </p:nvSpPr>
         <p:spPr>
           <a:xfrm>
-            <a:off x="3054096" y="2148840"/>
-            <a:ext cx="1874520" cy="1965960"/>
+            <a:off x="6355080" y="2057400"/>
+            <a:ext cx="5120640" cy="1508760"/>
           </a:xfrm>
           <a:prstGeom prst="rect">
             <a:avLst/>
@@ -9021,690 +9525,49 @@
               </a:lnSpc>
             </a:pPr>
             <a:r>
-              <a:rPr sz="1200" b="0">
+              <a:rPr sz="1250" b="0">
                 <a:solidFill>
                   <a:srgbClr val="475569"/>
                 </a:solidFill>
                 <a:latin typeface="Apple SD Gothic Neo"/>
               </a:rPr>
-              <a:t>4면·휠·유리·계기판·기존 손상을 OriPics로 촬영. 시각·GPS·기기 검증 자동, 메모 기입</a:t>
-            </a:r>
-          </a:p>
-        </p:txBody>
-      </p:sp>
-      <p:sp>
-        <p:nvSpPr>
-          <p:cNvPr id="15" name="Right Arrow 14"/>
+              <a:t>• 인수 시 직원이 사서함 개설(개설자 이름=업체명·지점) → 카운터 QR 스탠드 또는 문자 초대문으로 고객 참여(이름·역할 '고객' 고정)</a:t>
+            </a:r>
+          </a:p>
+          <a:p>
+            <a:pPr algn="l"/>
+            <a:r>
+              <a:rPr sz="1250" b="0">
+                <a:solidFill>
+                  <a:srgbClr val="475569"/>
+                </a:solidFill>
+              </a:rPr>
+              <a:t>• 카모아 CS 공용 계정을 참여자(역할 '플랫폼 담당자')로 초대 → 웹에서 모든 제휴 사서함 실시간 열람</a:t>
+            </a:r>
+          </a:p>
+          <a:p>
+            <a:pPr algn="l"/>
+            <a:r>
+              <a:rPr sz="1250" b="0">
+                <a:solidFill>
+                  <a:srgbClr val="475569"/>
+                </a:solidFill>
+              </a:rPr>
+              <a:t>• 사진은 공개링크로 OriPics 서버 보관, 사서함 삭제 전까지 삭제 불가</a:t>
+            </a:r>
+          </a:p>
+        </p:txBody>
+      </p:sp>
+      <p:sp>
+        <p:nvSpPr>
+          <p:cNvPr id="12" name="Rounded Rectangle 11"/>
           <p:cNvSpPr/>
           <p:nvPr/>
         </p:nvSpPr>
         <p:spPr>
           <a:xfrm>
-            <a:off x="5084064" y="2770632"/>
-            <a:ext cx="182880" cy="219456"/>
-          </a:xfrm>
-          <a:prstGeom prst="rightArrow">
-            <a:avLst/>
-          </a:prstGeom>
-          <a:solidFill>
-            <a:srgbClr val="E2E8F0"/>
-          </a:solidFill>
-          <a:ln>
-            <a:noFill/>
-          </a:ln>
-        </p:spPr>
-        <p:style>
-          <a:lnRef idx="1">
-            <a:schemeClr val="accent1"/>
-          </a:lnRef>
-          <a:fillRef idx="3">
-            <a:schemeClr val="accent1"/>
-          </a:fillRef>
-          <a:effectRef idx="2">
-            <a:schemeClr val="accent1"/>
-          </a:effectRef>
-          <a:fontRef idx="minor">
-            <a:schemeClr val="lt1"/>
-          </a:fontRef>
-        </p:style>
-        <p:txBody>
-          <a:bodyPr rtlCol="0" anchor="ctr"/>
-          <a:lstStyle/>
-          <a:p>
-            <a:pPr algn="ctr"/>
-          </a:p>
-        </p:txBody>
-      </p:sp>
-      <p:sp>
-        <p:nvSpPr>
-          <p:cNvPr id="16" name="Rounded Rectangle 15"/>
-          <p:cNvSpPr/>
-          <p:nvPr/>
-        </p:nvSpPr>
-        <p:spPr>
-          <a:xfrm>
-            <a:off x="5285232" y="1554480"/>
-            <a:ext cx="2148840" cy="2651760"/>
-          </a:xfrm>
-          <a:prstGeom prst="roundRect">
-            <a:avLst>
-              <a:gd name="adj" fmla="val 8000"/>
-            </a:avLst>
-          </a:prstGeom>
-          <a:solidFill>
-            <a:srgbClr val="FFFFFF"/>
-          </a:solidFill>
-          <a:ln w="9525">
-            <a:solidFill>
-              <a:srgbClr val="E2E8F0"/>
-            </a:solidFill>
-          </a:ln>
-          <a:effectLst/>
-        </p:spPr>
-        <p:style>
-          <a:lnRef idx="1">
-            <a:schemeClr val="accent1"/>
-          </a:lnRef>
-          <a:fillRef idx="3">
-            <a:schemeClr val="accent1"/>
-          </a:fillRef>
-          <a:effectRef idx="2">
-            <a:schemeClr val="accent1"/>
-          </a:effectRef>
-          <a:fontRef idx="minor">
-            <a:schemeClr val="lt1"/>
-          </a:fontRef>
-        </p:style>
-        <p:txBody>
-          <a:bodyPr rtlCol="0" anchor="ctr"/>
-          <a:lstStyle/>
-          <a:p>
-            <a:pPr algn="ctr"/>
-          </a:p>
-        </p:txBody>
-      </p:sp>
-      <p:sp>
-        <p:nvSpPr>
-          <p:cNvPr id="17" name="Oval 16"/>
-          <p:cNvSpPr/>
-          <p:nvPr/>
-        </p:nvSpPr>
-        <p:spPr>
-          <a:xfrm>
-            <a:off x="5422392" y="1691640"/>
-            <a:ext cx="329184" cy="329184"/>
-          </a:xfrm>
-          <a:prstGeom prst="ellipse">
-            <a:avLst/>
-          </a:prstGeom>
-          <a:solidFill>
-            <a:srgbClr val="1D4ED8"/>
-          </a:solidFill>
-          <a:ln>
-            <a:noFill/>
-          </a:ln>
-        </p:spPr>
-        <p:style>
-          <a:lnRef idx="1">
-            <a:schemeClr val="accent1"/>
-          </a:lnRef>
-          <a:fillRef idx="3">
-            <a:schemeClr val="accent1"/>
-          </a:fillRef>
-          <a:effectRef idx="2">
-            <a:schemeClr val="accent1"/>
-          </a:effectRef>
-          <a:fontRef idx="minor">
-            <a:schemeClr val="lt1"/>
-          </a:fontRef>
-        </p:style>
-        <p:txBody>
-          <a:bodyPr rtlCol="0" anchor="ctr" lIns="0" rIns="0" tIns="0" bIns="0"/>
-          <a:lstStyle/>
-          <a:p>
-            <a:pPr algn="ctr"/>
-            <a:r>
-              <a:rPr sz="1300" b="1">
-                <a:solidFill>
-                  <a:srgbClr val="FFFFFF"/>
-                </a:solidFill>
-                <a:latin typeface="Apple SD Gothic Neo"/>
-              </a:rPr>
-              <a:t>3</a:t>
-            </a:r>
-          </a:p>
-        </p:txBody>
-      </p:sp>
-      <p:sp>
-        <p:nvSpPr>
-          <p:cNvPr id="18" name="TextBox 17"/>
-          <p:cNvSpPr txBox="1"/>
-          <p:nvPr/>
-        </p:nvSpPr>
-        <p:spPr>
-          <a:xfrm>
-            <a:off x="5833872" y="1673352"/>
-            <a:ext cx="1508760" cy="365760"/>
-          </a:xfrm>
-          <a:prstGeom prst="rect">
-            <a:avLst/>
-          </a:prstGeom>
-          <a:noFill/>
-        </p:spPr>
-        <p:txBody>
-          <a:bodyPr wrap="square" anchor="t" lIns="45720" rIns="45720" tIns="27432" bIns="27432">
-            <a:spAutoFit/>
-          </a:bodyPr>
-          <a:lstStyle/>
-          <a:p>
-            <a:pPr algn="l">
-              <a:lnSpc>
-                <a:spcPct val="115000"/>
-              </a:lnSpc>
-            </a:pPr>
-            <a:r>
-              <a:rPr sz="1500" b="1">
-                <a:solidFill>
-                  <a:srgbClr val="0F172A"/>
-                </a:solidFill>
-                <a:latin typeface="Apple SD Gothic Neo"/>
-              </a:rPr>
-              <a:t>전송·공유</a:t>
-            </a:r>
-          </a:p>
-        </p:txBody>
-      </p:sp>
-      <p:sp>
-        <p:nvSpPr>
-          <p:cNvPr id="19" name="TextBox 18"/>
-          <p:cNvSpPr txBox="1"/>
-          <p:nvPr/>
-        </p:nvSpPr>
-        <p:spPr>
-          <a:xfrm>
-            <a:off x="5422392" y="2148840"/>
-            <a:ext cx="1874520" cy="1965960"/>
-          </a:xfrm>
-          <a:prstGeom prst="rect">
-            <a:avLst/>
-          </a:prstGeom>
-          <a:noFill/>
-        </p:spPr>
-        <p:txBody>
-          <a:bodyPr wrap="square" anchor="t" lIns="45720" rIns="45720" tIns="27432" bIns="27432">
-            <a:spAutoFit/>
-          </a:bodyPr>
-          <a:lstStyle/>
-          <a:p>
-            <a:pPr algn="l">
-              <a:lnSpc>
-                <a:spcPct val="120000"/>
-              </a:lnSpc>
-            </a:pPr>
-            <a:r>
-              <a:rPr sz="1200" b="0">
-                <a:solidFill>
-                  <a:srgbClr val="475569"/>
-                </a:solidFill>
-                <a:latin typeface="Apple SD Gothic Neo"/>
-              </a:rPr>
-              <a:t>인증 → 링크 생성 → 사서함으로 업체·카모아 메일 전송. 고객에게 링크 문자</a:t>
-            </a:r>
-          </a:p>
-        </p:txBody>
-      </p:sp>
-      <p:sp>
-        <p:nvSpPr>
-          <p:cNvPr id="20" name="Right Arrow 19"/>
-          <p:cNvSpPr/>
-          <p:nvPr/>
-        </p:nvSpPr>
-        <p:spPr>
-          <a:xfrm>
-            <a:off x="7452360" y="2770632"/>
-            <a:ext cx="182880" cy="219456"/>
-          </a:xfrm>
-          <a:prstGeom prst="rightArrow">
-            <a:avLst/>
-          </a:prstGeom>
-          <a:solidFill>
-            <a:srgbClr val="E2E8F0"/>
-          </a:solidFill>
-          <a:ln>
-            <a:noFill/>
-          </a:ln>
-        </p:spPr>
-        <p:style>
-          <a:lnRef idx="1">
-            <a:schemeClr val="accent1"/>
-          </a:lnRef>
-          <a:fillRef idx="3">
-            <a:schemeClr val="accent1"/>
-          </a:fillRef>
-          <a:effectRef idx="2">
-            <a:schemeClr val="accent1"/>
-          </a:effectRef>
-          <a:fontRef idx="minor">
-            <a:schemeClr val="lt1"/>
-          </a:fontRef>
-        </p:style>
-        <p:txBody>
-          <a:bodyPr rtlCol="0" anchor="ctr"/>
-          <a:lstStyle/>
-          <a:p>
-            <a:pPr algn="ctr"/>
-          </a:p>
-        </p:txBody>
-      </p:sp>
-      <p:sp>
-        <p:nvSpPr>
-          <p:cNvPr id="21" name="Rounded Rectangle 20"/>
-          <p:cNvSpPr/>
-          <p:nvPr/>
-        </p:nvSpPr>
-        <p:spPr>
-          <a:xfrm>
-            <a:off x="7653528" y="1554480"/>
-            <a:ext cx="2148840" cy="2651760"/>
-          </a:xfrm>
-          <a:prstGeom prst="roundRect">
-            <a:avLst>
-              <a:gd name="adj" fmla="val 8000"/>
-            </a:avLst>
-          </a:prstGeom>
-          <a:solidFill>
-            <a:srgbClr val="FFFFFF"/>
-          </a:solidFill>
-          <a:ln w="9525">
-            <a:solidFill>
-              <a:srgbClr val="E2E8F0"/>
-            </a:solidFill>
-          </a:ln>
-          <a:effectLst/>
-        </p:spPr>
-        <p:style>
-          <a:lnRef idx="1">
-            <a:schemeClr val="accent1"/>
-          </a:lnRef>
-          <a:fillRef idx="3">
-            <a:schemeClr val="accent1"/>
-          </a:fillRef>
-          <a:effectRef idx="2">
-            <a:schemeClr val="accent1"/>
-          </a:effectRef>
-          <a:fontRef idx="minor">
-            <a:schemeClr val="lt1"/>
-          </a:fontRef>
-        </p:style>
-        <p:txBody>
-          <a:bodyPr rtlCol="0" anchor="ctr"/>
-          <a:lstStyle/>
-          <a:p>
-            <a:pPr algn="ctr"/>
-          </a:p>
-        </p:txBody>
-      </p:sp>
-      <p:sp>
-        <p:nvSpPr>
-          <p:cNvPr id="22" name="Oval 21"/>
-          <p:cNvSpPr/>
-          <p:nvPr/>
-        </p:nvSpPr>
-        <p:spPr>
-          <a:xfrm>
-            <a:off x="7790688" y="1691640"/>
-            <a:ext cx="329184" cy="329184"/>
-          </a:xfrm>
-          <a:prstGeom prst="ellipse">
-            <a:avLst/>
-          </a:prstGeom>
-          <a:solidFill>
-            <a:srgbClr val="1D4ED8"/>
-          </a:solidFill>
-          <a:ln>
-            <a:noFill/>
-          </a:ln>
-        </p:spPr>
-        <p:style>
-          <a:lnRef idx="1">
-            <a:schemeClr val="accent1"/>
-          </a:lnRef>
-          <a:fillRef idx="3">
-            <a:schemeClr val="accent1"/>
-          </a:fillRef>
-          <a:effectRef idx="2">
-            <a:schemeClr val="accent1"/>
-          </a:effectRef>
-          <a:fontRef idx="minor">
-            <a:schemeClr val="lt1"/>
-          </a:fontRef>
-        </p:style>
-        <p:txBody>
-          <a:bodyPr rtlCol="0" anchor="ctr" lIns="0" rIns="0" tIns="0" bIns="0"/>
-          <a:lstStyle/>
-          <a:p>
-            <a:pPr algn="ctr"/>
-            <a:r>
-              <a:rPr sz="1300" b="1">
-                <a:solidFill>
-                  <a:srgbClr val="FFFFFF"/>
-                </a:solidFill>
-                <a:latin typeface="Apple SD Gothic Neo"/>
-              </a:rPr>
-              <a:t>4</a:t>
-            </a:r>
-          </a:p>
-        </p:txBody>
-      </p:sp>
-      <p:sp>
-        <p:nvSpPr>
-          <p:cNvPr id="23" name="TextBox 22"/>
-          <p:cNvSpPr txBox="1"/>
-          <p:nvPr/>
-        </p:nvSpPr>
-        <p:spPr>
-          <a:xfrm>
-            <a:off x="8202168" y="1673352"/>
-            <a:ext cx="1508760" cy="365760"/>
-          </a:xfrm>
-          <a:prstGeom prst="rect">
-            <a:avLst/>
-          </a:prstGeom>
-          <a:noFill/>
-        </p:spPr>
-        <p:txBody>
-          <a:bodyPr wrap="square" anchor="t" lIns="45720" rIns="45720" tIns="27432" bIns="27432">
-            <a:spAutoFit/>
-          </a:bodyPr>
-          <a:lstStyle/>
-          <a:p>
-            <a:pPr algn="l">
-              <a:lnSpc>
-                <a:spcPct val="115000"/>
-              </a:lnSpc>
-            </a:pPr>
-            <a:r>
-              <a:rPr sz="1500" b="1">
-                <a:solidFill>
-                  <a:srgbClr val="0F172A"/>
-                </a:solidFill>
-                <a:latin typeface="Apple SD Gothic Neo"/>
-              </a:rPr>
-              <a:t>반납 촬영</a:t>
-            </a:r>
-          </a:p>
-        </p:txBody>
-      </p:sp>
-      <p:sp>
-        <p:nvSpPr>
-          <p:cNvPr id="24" name="TextBox 23"/>
-          <p:cNvSpPr txBox="1"/>
-          <p:nvPr/>
-        </p:nvSpPr>
-        <p:spPr>
-          <a:xfrm>
-            <a:off x="7790688" y="2148840"/>
-            <a:ext cx="1874520" cy="1965960"/>
-          </a:xfrm>
-          <a:prstGeom prst="rect">
-            <a:avLst/>
-          </a:prstGeom>
-          <a:noFill/>
-        </p:spPr>
-        <p:txBody>
-          <a:bodyPr wrap="square" anchor="t" lIns="45720" rIns="45720" tIns="27432" bIns="27432">
-            <a:spAutoFit/>
-          </a:bodyPr>
-          <a:lstStyle/>
-          <a:p>
-            <a:pPr algn="l">
-              <a:lnSpc>
-                <a:spcPct val="120000"/>
-              </a:lnSpc>
-            </a:pPr>
-            <a:r>
-              <a:rPr sz="1200" b="0">
-                <a:solidFill>
-                  <a:srgbClr val="475569"/>
-                </a:solidFill>
-                <a:latin typeface="Apple SD Gothic Neo"/>
-              </a:rPr>
-              <a:t>같은 절차. 새 손상은 인수·반납 링크를 나란히 보여 청구</a:t>
-            </a:r>
-          </a:p>
-        </p:txBody>
-      </p:sp>
-      <p:sp>
-        <p:nvSpPr>
-          <p:cNvPr id="25" name="Right Arrow 24"/>
-          <p:cNvSpPr/>
-          <p:nvPr/>
-        </p:nvSpPr>
-        <p:spPr>
-          <a:xfrm>
-            <a:off x="9820656" y="2770632"/>
-            <a:ext cx="182880" cy="219456"/>
-          </a:xfrm>
-          <a:prstGeom prst="rightArrow">
-            <a:avLst/>
-          </a:prstGeom>
-          <a:solidFill>
-            <a:srgbClr val="E2E8F0"/>
-          </a:solidFill>
-          <a:ln>
-            <a:noFill/>
-          </a:ln>
-        </p:spPr>
-        <p:style>
-          <a:lnRef idx="1">
-            <a:schemeClr val="accent1"/>
-          </a:lnRef>
-          <a:fillRef idx="3">
-            <a:schemeClr val="accent1"/>
-          </a:fillRef>
-          <a:effectRef idx="2">
-            <a:schemeClr val="accent1"/>
-          </a:effectRef>
-          <a:fontRef idx="minor">
-            <a:schemeClr val="lt1"/>
-          </a:fontRef>
-        </p:style>
-        <p:txBody>
-          <a:bodyPr rtlCol="0" anchor="ctr"/>
-          <a:lstStyle/>
-          <a:p>
-            <a:pPr algn="ctr"/>
-          </a:p>
-        </p:txBody>
-      </p:sp>
-      <p:sp>
-        <p:nvSpPr>
-          <p:cNvPr id="26" name="Rounded Rectangle 25"/>
-          <p:cNvSpPr/>
-          <p:nvPr/>
-        </p:nvSpPr>
-        <p:spPr>
-          <a:xfrm>
-            <a:off x="10021824" y="1554480"/>
-            <a:ext cx="2148840" cy="2651760"/>
-          </a:xfrm>
-          <a:prstGeom prst="roundRect">
-            <a:avLst>
-              <a:gd name="adj" fmla="val 8000"/>
-            </a:avLst>
-          </a:prstGeom>
-          <a:solidFill>
-            <a:srgbClr val="ECFDF5"/>
-          </a:solidFill>
-          <a:ln w="9525">
-            <a:solidFill>
-              <a:srgbClr val="E2E8F0"/>
-            </a:solidFill>
-          </a:ln>
-          <a:effectLst/>
-        </p:spPr>
-        <p:style>
-          <a:lnRef idx="1">
-            <a:schemeClr val="accent1"/>
-          </a:lnRef>
-          <a:fillRef idx="3">
-            <a:schemeClr val="accent1"/>
-          </a:fillRef>
-          <a:effectRef idx="2">
-            <a:schemeClr val="accent1"/>
-          </a:effectRef>
-          <a:fontRef idx="minor">
-            <a:schemeClr val="lt1"/>
-          </a:fontRef>
-        </p:style>
-        <p:txBody>
-          <a:bodyPr rtlCol="0" anchor="ctr"/>
-          <a:lstStyle/>
-          <a:p>
-            <a:pPr algn="ctr"/>
-          </a:p>
-        </p:txBody>
-      </p:sp>
-      <p:sp>
-        <p:nvSpPr>
-          <p:cNvPr id="27" name="Oval 26"/>
-          <p:cNvSpPr/>
-          <p:nvPr/>
-        </p:nvSpPr>
-        <p:spPr>
-          <a:xfrm>
-            <a:off x="10158984" y="1691640"/>
-            <a:ext cx="329184" cy="329184"/>
-          </a:xfrm>
-          <a:prstGeom prst="ellipse">
-            <a:avLst/>
-          </a:prstGeom>
-          <a:solidFill>
-            <a:srgbClr val="1D4ED8"/>
-          </a:solidFill>
-          <a:ln>
-            <a:noFill/>
-          </a:ln>
-        </p:spPr>
-        <p:style>
-          <a:lnRef idx="1">
-            <a:schemeClr val="accent1"/>
-          </a:lnRef>
-          <a:fillRef idx="3">
-            <a:schemeClr val="accent1"/>
-          </a:fillRef>
-          <a:effectRef idx="2">
-            <a:schemeClr val="accent1"/>
-          </a:effectRef>
-          <a:fontRef idx="minor">
-            <a:schemeClr val="lt1"/>
-          </a:fontRef>
-        </p:style>
-        <p:txBody>
-          <a:bodyPr rtlCol="0" anchor="ctr" lIns="0" rIns="0" tIns="0" bIns="0"/>
-          <a:lstStyle/>
-          <a:p>
-            <a:pPr algn="ctr"/>
-            <a:r>
-              <a:rPr sz="1300" b="1">
-                <a:solidFill>
-                  <a:srgbClr val="FFFFFF"/>
-                </a:solidFill>
-                <a:latin typeface="Apple SD Gothic Neo"/>
-              </a:rPr>
-              <a:t>5</a:t>
-            </a:r>
-          </a:p>
-        </p:txBody>
-      </p:sp>
-      <p:sp>
-        <p:nvSpPr>
-          <p:cNvPr id="28" name="TextBox 27"/>
-          <p:cNvSpPr txBox="1"/>
-          <p:nvPr/>
-        </p:nvSpPr>
-        <p:spPr>
-          <a:xfrm>
-            <a:off x="10570464" y="1673352"/>
-            <a:ext cx="1508760" cy="365760"/>
-          </a:xfrm>
-          <a:prstGeom prst="rect">
-            <a:avLst/>
-          </a:prstGeom>
-          <a:noFill/>
-        </p:spPr>
-        <p:txBody>
-          <a:bodyPr wrap="square" anchor="t" lIns="45720" rIns="45720" tIns="27432" bIns="27432">
-            <a:spAutoFit/>
-          </a:bodyPr>
-          <a:lstStyle/>
-          <a:p>
-            <a:pPr algn="l">
-              <a:lnSpc>
-                <a:spcPct val="115000"/>
-              </a:lnSpc>
-            </a:pPr>
-            <a:r>
-              <a:rPr sz="1500" b="1">
-                <a:solidFill>
-                  <a:srgbClr val="047857"/>
-                </a:solidFill>
-                <a:latin typeface="Apple SD Gothic Neo"/>
-              </a:rPr>
-              <a:t>분쟁 판단</a:t>
-            </a:r>
-          </a:p>
-        </p:txBody>
-      </p:sp>
-      <p:sp>
-        <p:nvSpPr>
-          <p:cNvPr id="29" name="TextBox 28"/>
-          <p:cNvSpPr txBox="1"/>
-          <p:nvPr/>
-        </p:nvSpPr>
-        <p:spPr>
-          <a:xfrm>
-            <a:off x="10158984" y="2148840"/>
-            <a:ext cx="1874520" cy="1965960"/>
-          </a:xfrm>
-          <a:prstGeom prst="rect">
-            <a:avLst/>
-          </a:prstGeom>
-          <a:noFill/>
-        </p:spPr>
-        <p:txBody>
-          <a:bodyPr wrap="square" anchor="t" lIns="45720" rIns="45720" tIns="27432" bIns="27432">
-            <a:spAutoFit/>
-          </a:bodyPr>
-          <a:lstStyle/>
-          <a:p>
-            <a:pPr algn="l">
-              <a:lnSpc>
-                <a:spcPct val="120000"/>
-              </a:lnSpc>
-            </a:pPr>
-            <a:r>
-              <a:rPr sz="1200" b="0">
-                <a:solidFill>
-                  <a:srgbClr val="475569"/>
-                </a:solidFill>
-                <a:latin typeface="Apple SD Gothic Neo"/>
-              </a:rPr>
-              <a:t>카모아 CS: 링크 두 개 열어 시각·원본 확인 후 판단. 과태료는 반납 시각 링크로 이용자 특정</a:t>
-            </a:r>
-          </a:p>
-        </p:txBody>
-      </p:sp>
-      <p:sp>
-        <p:nvSpPr>
-          <p:cNvPr id="30" name="Rounded Rectangle 29"/>
-          <p:cNvSpPr/>
-          <p:nvPr/>
-        </p:nvSpPr>
-        <p:spPr>
-          <a:xfrm>
-            <a:off x="548640" y="4480560"/>
-            <a:ext cx="11064240" cy="1463040"/>
+            <a:off x="548640" y="3886200"/>
+            <a:ext cx="11064240" cy="2103120"/>
           </a:xfrm>
           <a:prstGeom prst="roundRect">
             <a:avLst>
@@ -9745,14 +9608,14 @@
       </p:sp>
       <p:sp>
         <p:nvSpPr>
-          <p:cNvPr id="31" name="TextBox 30"/>
+          <p:cNvPr id="13" name="TextBox 12"/>
           <p:cNvSpPr txBox="1"/>
           <p:nvPr/>
         </p:nvSpPr>
         <p:spPr>
           <a:xfrm>
-            <a:off x="731520" y="4572000"/>
-            <a:ext cx="10789920" cy="1280160"/>
+            <a:off x="731520" y="3977639"/>
+            <a:ext cx="10789920" cy="365760"/>
           </a:xfrm>
           <a:prstGeom prst="rect">
             <a:avLst/>
@@ -9767,49 +9630,89 @@
           <a:p>
             <a:pPr algn="l">
               <a:lnSpc>
+                <a:spcPct val="115000"/>
+              </a:lnSpc>
+            </a:pPr>
+            <a:r>
+              <a:rPr sz="1400" b="1">
+                <a:solidFill>
+                  <a:srgbClr val="1D4ED8"/>
+                </a:solidFill>
+                <a:latin typeface="Apple SD Gothic Neo"/>
+              </a:rPr>
+              <a:t>기존 흐름은 그대로, 사서함 촬영만 추가됩니다</a:t>
+            </a:r>
+          </a:p>
+        </p:txBody>
+      </p:sp>
+      <p:sp>
+        <p:nvSpPr>
+          <p:cNvPr id="14" name="TextBox 13"/>
+          <p:cNvSpPr txBox="1"/>
+          <p:nvPr/>
+        </p:nvSpPr>
+        <p:spPr>
+          <a:xfrm>
+            <a:off x="731520" y="4343400"/>
+            <a:ext cx="10789920" cy="1554480"/>
+          </a:xfrm>
+          <a:prstGeom prst="rect">
+            <a:avLst/>
+          </a:prstGeom>
+          <a:noFill/>
+        </p:spPr>
+        <p:txBody>
+          <a:bodyPr wrap="square" anchor="t" lIns="45720" rIns="45720" tIns="27432" bIns="27432">
+            <a:spAutoFit/>
+          </a:bodyPr>
+          <a:lstStyle/>
+          <a:p>
+            <a:pPr algn="l">
+              <a:lnSpc>
                 <a:spcPct val="125000"/>
               </a:lnSpc>
             </a:pPr>
             <a:r>
-              <a:rPr sz="1200" b="0">
+              <a:rPr sz="1300" b="0">
                 <a:solidFill>
                   <a:srgbClr val="475569"/>
                 </a:solidFill>
                 <a:latin typeface="Apple SD Gothic Neo"/>
               </a:rPr>
-              <a:t>• 카모아 앱·파트너스 화면은 1단계에서 바뀌지 않습니다. 바뀌는 것은 '사진에 붙어 있는 정보'와 '사진이 도착하는 곳'입니다.</a:t>
-            </a:r>
-          </a:p>
-          <a:p>
-            <a:pPr algn="l">
-              <a:lnSpc>
-                <a:spcPct val="125000"/>
-              </a:lnSpc>
-            </a:pPr>
-            <a:r>
-              <a:rPr sz="1200" b="0">
+              <a:t>• 직원용 앱 손상 사진·전자계약서는 지금처럼. 사서함 [촬영하기]로 4면·손상 부위·계기판을 한 번 더 찍으면 시각·GPS·기기 검증·링크가 자동입니다(장당 몇 초).</a:t>
+            </a:r>
+          </a:p>
+          <a:p>
+            <a:pPr algn="l"/>
+            <a:r>
+              <a:rPr sz="1300" b="0">
                 <a:solidFill>
                   <a:srgbClr val="475569"/>
                 </a:solidFill>
-                <a:latin typeface="Apple SD Gothic Neo"/>
-              </a:rPr>
-              <a:t>• 고객이 같은 사서함에 보내려면 사서함 번호·비밀번호를 예약 안내에 넣는 운영 합의가 필요합니다.</a:t>
-            </a:r>
-          </a:p>
-          <a:p>
-            <a:pPr algn="l">
-              <a:lnSpc>
-                <a:spcPct val="125000"/>
-              </a:lnSpc>
-            </a:pPr>
-            <a:r>
-              <a:rPr sz="1200" b="0">
+              </a:rPr>
+              <a:t>• 공개메모(100자)에 '앞 범퍼 좌측 기존 스크래치'처럼 적으면 그리드·상세·PDF에 함께 표시됩니다.</a:t>
+            </a:r>
+          </a:p>
+          <a:p>
+            <a:pPr algn="l"/>
+            <a:r>
+              <a:rPr sz="1300" b="0">
                 <a:solidFill>
                   <a:srgbClr val="475569"/>
                 </a:solidFill>
-                <a:latin typeface="Apple SD Gothic Neo"/>
-              </a:rPr>
-              <a:t>• 예약 번호는 1단계에서 메일 제목에 직접 입력 → 2단계에서 자동화.</a:t>
+              </a:rPr>
+              <a:t>• 고객은 출발 전 사서함에서 인수 사진을 열어 봅니다 → 사진마다 '미열람 0'이 되면 고객 확인 완료. 고객이 직접 찍은 사진도 같은 사서함에 남습니다.</a:t>
+            </a:r>
+          </a:p>
+          <a:p>
+            <a:pPr algn="l"/>
+            <a:r>
+              <a:rPr sz="1300" b="0">
+                <a:solidFill>
+                  <a:srgbClr val="475569"/>
+                </a:solidFill>
+              </a:rPr>
+              <a:t>• 반납 후 직원이 사서함을 '잠금'(읽기 전용)하고, 분쟁 시 CS는 웹에서 사서함을 열거나 확인서 PDF 한 장으로 판단합니다.</a:t>
             </a:r>
           </a:p>
         </p:txBody>
@@ -9909,7 +9812,7 @@
                 </a:solidFill>
                 <a:latin typeface="Apple SD Gothic Neo"/>
               </a:rPr>
-              <a:t>BENEFITS FOR CARMORE</a:t>
+              <a:t>TO-BE</a:t>
             </a:r>
           </a:p>
         </p:txBody>
@@ -9948,7 +9851,7 @@
                 </a:solidFill>
                 <a:latin typeface="Apple SD Gothic Neo"/>
               </a:rPr>
-              <a:t>카모아가 얻는 것</a:t>
+              <a:t>제휴 후 — 인수에서 분쟁 판단까지</a:t>
             </a:r>
           </a:p>
         </p:txBody>
@@ -10001,7 +9904,891 @@
         <p:spPr>
           <a:xfrm>
             <a:off x="548640" y="1554480"/>
-            <a:ext cx="3566160" cy="1965960"/>
+            <a:ext cx="2148840" cy="2651760"/>
+          </a:xfrm>
+          <a:prstGeom prst="roundRect">
+            <a:avLst>
+              <a:gd name="adj" fmla="val 8000"/>
+            </a:avLst>
+          </a:prstGeom>
+          <a:solidFill>
+            <a:srgbClr val="FFFFFF"/>
+          </a:solidFill>
+          <a:ln w="9525">
+            <a:solidFill>
+              <a:srgbClr val="E2E8F0"/>
+            </a:solidFill>
+          </a:ln>
+          <a:effectLst/>
+        </p:spPr>
+        <p:style>
+          <a:lnRef idx="1">
+            <a:schemeClr val="accent1"/>
+          </a:lnRef>
+          <a:fillRef idx="3">
+            <a:schemeClr val="accent1"/>
+          </a:fillRef>
+          <a:effectRef idx="2">
+            <a:schemeClr val="accent1"/>
+          </a:effectRef>
+          <a:fontRef idx="minor">
+            <a:schemeClr val="lt1"/>
+          </a:fontRef>
+        </p:style>
+        <p:txBody>
+          <a:bodyPr rtlCol="0" anchor="ctr"/>
+          <a:lstStyle/>
+          <a:p>
+            <a:pPr algn="ctr"/>
+          </a:p>
+        </p:txBody>
+      </p:sp>
+      <p:sp>
+        <p:nvSpPr>
+          <p:cNvPr id="7" name="Oval 6"/>
+          <p:cNvSpPr/>
+          <p:nvPr/>
+        </p:nvSpPr>
+        <p:spPr>
+          <a:xfrm>
+            <a:off x="685800" y="1691640"/>
+            <a:ext cx="329184" cy="329184"/>
+          </a:xfrm>
+          <a:prstGeom prst="ellipse">
+            <a:avLst/>
+          </a:prstGeom>
+          <a:solidFill>
+            <a:srgbClr val="1D4ED8"/>
+          </a:solidFill>
+          <a:ln>
+            <a:noFill/>
+          </a:ln>
+        </p:spPr>
+        <p:style>
+          <a:lnRef idx="1">
+            <a:schemeClr val="accent1"/>
+          </a:lnRef>
+          <a:fillRef idx="3">
+            <a:schemeClr val="accent1"/>
+          </a:fillRef>
+          <a:effectRef idx="2">
+            <a:schemeClr val="accent1"/>
+          </a:effectRef>
+          <a:fontRef idx="minor">
+            <a:schemeClr val="lt1"/>
+          </a:fontRef>
+        </p:style>
+        <p:txBody>
+          <a:bodyPr rtlCol="0" anchor="ctr" lIns="0" rIns="0" tIns="0" bIns="0"/>
+          <a:lstStyle/>
+          <a:p>
+            <a:pPr algn="ctr"/>
+            <a:r>
+              <a:rPr sz="1300" b="1">
+                <a:solidFill>
+                  <a:srgbClr val="FFFFFF"/>
+                </a:solidFill>
+                <a:latin typeface="Apple SD Gothic Neo"/>
+              </a:rPr>
+              <a:t>1</a:t>
+            </a:r>
+          </a:p>
+        </p:txBody>
+      </p:sp>
+      <p:sp>
+        <p:nvSpPr>
+          <p:cNvPr id="8" name="TextBox 7"/>
+          <p:cNvSpPr txBox="1"/>
+          <p:nvPr/>
+        </p:nvSpPr>
+        <p:spPr>
+          <a:xfrm>
+            <a:off x="1097280" y="1673352"/>
+            <a:ext cx="1508760" cy="365760"/>
+          </a:xfrm>
+          <a:prstGeom prst="rect">
+            <a:avLst/>
+          </a:prstGeom>
+          <a:noFill/>
+        </p:spPr>
+        <p:txBody>
+          <a:bodyPr wrap="square" anchor="t" lIns="45720" rIns="45720" tIns="27432" bIns="27432">
+            <a:spAutoFit/>
+          </a:bodyPr>
+          <a:lstStyle/>
+          <a:p>
+            <a:pPr algn="l">
+              <a:lnSpc>
+                <a:spcPct val="115000"/>
+              </a:lnSpc>
+            </a:pPr>
+            <a:r>
+              <a:rPr sz="1500" b="1">
+                <a:solidFill>
+                  <a:srgbClr val="0F172A"/>
+                </a:solidFill>
+                <a:latin typeface="Apple SD Gothic Neo"/>
+              </a:rPr>
+              <a:t>사서함 개설</a:t>
+            </a:r>
+          </a:p>
+        </p:txBody>
+      </p:sp>
+      <p:sp>
+        <p:nvSpPr>
+          <p:cNvPr id="9" name="TextBox 8"/>
+          <p:cNvSpPr txBox="1"/>
+          <p:nvPr/>
+        </p:nvSpPr>
+        <p:spPr>
+          <a:xfrm>
+            <a:off x="685800" y="2148840"/>
+            <a:ext cx="1874520" cy="1965960"/>
+          </a:xfrm>
+          <a:prstGeom prst="rect">
+            <a:avLst/>
+          </a:prstGeom>
+          <a:noFill/>
+        </p:spPr>
+        <p:txBody>
+          <a:bodyPr wrap="square" anchor="t" lIns="45720" rIns="45720" tIns="27432" bIns="27432">
+            <a:spAutoFit/>
+          </a:bodyPr>
+          <a:lstStyle/>
+          <a:p>
+            <a:pPr algn="l">
+              <a:lnSpc>
+                <a:spcPct val="120000"/>
+              </a:lnSpc>
+            </a:pPr>
+            <a:r>
+              <a:rPr sz="1200" b="0">
+                <a:solidFill>
+                  <a:srgbClr val="475569"/>
+                </a:solidFill>
+                <a:latin typeface="Apple SD Gothic Neo"/>
+              </a:rPr>
+              <a:t>예약 확정 후 직원이 예약번호로 사서함 개설. 카모아 CS 계정 자동 초대(운영 합의)</a:t>
+            </a:r>
+          </a:p>
+        </p:txBody>
+      </p:sp>
+      <p:sp>
+        <p:nvSpPr>
+          <p:cNvPr id="10" name="Right Arrow 9"/>
+          <p:cNvSpPr/>
+          <p:nvPr/>
+        </p:nvSpPr>
+        <p:spPr>
+          <a:xfrm>
+            <a:off x="2715768" y="2770632"/>
+            <a:ext cx="182880" cy="219456"/>
+          </a:xfrm>
+          <a:prstGeom prst="rightArrow">
+            <a:avLst/>
+          </a:prstGeom>
+          <a:solidFill>
+            <a:srgbClr val="E2E8F0"/>
+          </a:solidFill>
+          <a:ln>
+            <a:noFill/>
+          </a:ln>
+        </p:spPr>
+        <p:style>
+          <a:lnRef idx="1">
+            <a:schemeClr val="accent1"/>
+          </a:lnRef>
+          <a:fillRef idx="3">
+            <a:schemeClr val="accent1"/>
+          </a:fillRef>
+          <a:effectRef idx="2">
+            <a:schemeClr val="accent1"/>
+          </a:effectRef>
+          <a:fontRef idx="minor">
+            <a:schemeClr val="lt1"/>
+          </a:fontRef>
+        </p:style>
+        <p:txBody>
+          <a:bodyPr rtlCol="0" anchor="ctr"/>
+          <a:lstStyle/>
+          <a:p>
+            <a:pPr algn="ctr"/>
+          </a:p>
+        </p:txBody>
+      </p:sp>
+      <p:sp>
+        <p:nvSpPr>
+          <p:cNvPr id="11" name="Rounded Rectangle 10"/>
+          <p:cNvSpPr/>
+          <p:nvPr/>
+        </p:nvSpPr>
+        <p:spPr>
+          <a:xfrm>
+            <a:off x="2916936" y="1554480"/>
+            <a:ext cx="2148840" cy="2651760"/>
+          </a:xfrm>
+          <a:prstGeom prst="roundRect">
+            <a:avLst>
+              <a:gd name="adj" fmla="val 8000"/>
+            </a:avLst>
+          </a:prstGeom>
+          <a:solidFill>
+            <a:srgbClr val="FFFFFF"/>
+          </a:solidFill>
+          <a:ln w="9525">
+            <a:solidFill>
+              <a:srgbClr val="E2E8F0"/>
+            </a:solidFill>
+          </a:ln>
+          <a:effectLst/>
+        </p:spPr>
+        <p:style>
+          <a:lnRef idx="1">
+            <a:schemeClr val="accent1"/>
+          </a:lnRef>
+          <a:fillRef idx="3">
+            <a:schemeClr val="accent1"/>
+          </a:fillRef>
+          <a:effectRef idx="2">
+            <a:schemeClr val="accent1"/>
+          </a:effectRef>
+          <a:fontRef idx="minor">
+            <a:schemeClr val="lt1"/>
+          </a:fontRef>
+        </p:style>
+        <p:txBody>
+          <a:bodyPr rtlCol="0" anchor="ctr"/>
+          <a:lstStyle/>
+          <a:p>
+            <a:pPr algn="ctr"/>
+          </a:p>
+        </p:txBody>
+      </p:sp>
+      <p:sp>
+        <p:nvSpPr>
+          <p:cNvPr id="12" name="Oval 11"/>
+          <p:cNvSpPr/>
+          <p:nvPr/>
+        </p:nvSpPr>
+        <p:spPr>
+          <a:xfrm>
+            <a:off x="3054096" y="1691640"/>
+            <a:ext cx="329184" cy="329184"/>
+          </a:xfrm>
+          <a:prstGeom prst="ellipse">
+            <a:avLst/>
+          </a:prstGeom>
+          <a:solidFill>
+            <a:srgbClr val="1D4ED8"/>
+          </a:solidFill>
+          <a:ln>
+            <a:noFill/>
+          </a:ln>
+        </p:spPr>
+        <p:style>
+          <a:lnRef idx="1">
+            <a:schemeClr val="accent1"/>
+          </a:lnRef>
+          <a:fillRef idx="3">
+            <a:schemeClr val="accent1"/>
+          </a:fillRef>
+          <a:effectRef idx="2">
+            <a:schemeClr val="accent1"/>
+          </a:effectRef>
+          <a:fontRef idx="minor">
+            <a:schemeClr val="lt1"/>
+          </a:fontRef>
+        </p:style>
+        <p:txBody>
+          <a:bodyPr rtlCol="0" anchor="ctr" lIns="0" rIns="0" tIns="0" bIns="0"/>
+          <a:lstStyle/>
+          <a:p>
+            <a:pPr algn="ctr"/>
+            <a:r>
+              <a:rPr sz="1300" b="1">
+                <a:solidFill>
+                  <a:srgbClr val="FFFFFF"/>
+                </a:solidFill>
+                <a:latin typeface="Apple SD Gothic Neo"/>
+              </a:rPr>
+              <a:t>2</a:t>
+            </a:r>
+          </a:p>
+        </p:txBody>
+      </p:sp>
+      <p:sp>
+        <p:nvSpPr>
+          <p:cNvPr id="13" name="TextBox 12"/>
+          <p:cNvSpPr txBox="1"/>
+          <p:nvPr/>
+        </p:nvSpPr>
+        <p:spPr>
+          <a:xfrm>
+            <a:off x="3465576" y="1673352"/>
+            <a:ext cx="1508760" cy="365760"/>
+          </a:xfrm>
+          <a:prstGeom prst="rect">
+            <a:avLst/>
+          </a:prstGeom>
+          <a:noFill/>
+        </p:spPr>
+        <p:txBody>
+          <a:bodyPr wrap="square" anchor="t" lIns="45720" rIns="45720" tIns="27432" bIns="27432">
+            <a:spAutoFit/>
+          </a:bodyPr>
+          <a:lstStyle/>
+          <a:p>
+            <a:pPr algn="l">
+              <a:lnSpc>
+                <a:spcPct val="115000"/>
+              </a:lnSpc>
+            </a:pPr>
+            <a:r>
+              <a:rPr sz="1500" b="1">
+                <a:solidFill>
+                  <a:srgbClr val="0F172A"/>
+                </a:solidFill>
+                <a:latin typeface="Apple SD Gothic Neo"/>
+              </a:rPr>
+              <a:t>고객 초대</a:t>
+            </a:r>
+          </a:p>
+        </p:txBody>
+      </p:sp>
+      <p:sp>
+        <p:nvSpPr>
+          <p:cNvPr id="14" name="TextBox 13"/>
+          <p:cNvSpPr txBox="1"/>
+          <p:nvPr/>
+        </p:nvSpPr>
+        <p:spPr>
+          <a:xfrm>
+            <a:off x="3054096" y="2148840"/>
+            <a:ext cx="1874520" cy="1965960"/>
+          </a:xfrm>
+          <a:prstGeom prst="rect">
+            <a:avLst/>
+          </a:prstGeom>
+          <a:noFill/>
+        </p:spPr>
+        <p:txBody>
+          <a:bodyPr wrap="square" anchor="t" lIns="45720" rIns="45720" tIns="27432" bIns="27432">
+            <a:spAutoFit/>
+          </a:bodyPr>
+          <a:lstStyle/>
+          <a:p>
+            <a:pPr algn="l">
+              <a:lnSpc>
+                <a:spcPct val="120000"/>
+              </a:lnSpc>
+            </a:pPr>
+            <a:r>
+              <a:rPr sz="1200" b="0">
+                <a:solidFill>
+                  <a:srgbClr val="475569"/>
+                </a:solidFill>
+                <a:latin typeface="Apple SD Gothic Neo"/>
+              </a:rPr>
+              <a:t>카운터 QR 스캔 또는 문자 초대문 → 고객 이름·역할 고정으로 참여. 앱 설치·로그인만</a:t>
+            </a:r>
+          </a:p>
+        </p:txBody>
+      </p:sp>
+      <p:sp>
+        <p:nvSpPr>
+          <p:cNvPr id="15" name="Right Arrow 14"/>
+          <p:cNvSpPr/>
+          <p:nvPr/>
+        </p:nvSpPr>
+        <p:spPr>
+          <a:xfrm>
+            <a:off x="5084064" y="2770632"/>
+            <a:ext cx="182880" cy="219456"/>
+          </a:xfrm>
+          <a:prstGeom prst="rightArrow">
+            <a:avLst/>
+          </a:prstGeom>
+          <a:solidFill>
+            <a:srgbClr val="E2E8F0"/>
+          </a:solidFill>
+          <a:ln>
+            <a:noFill/>
+          </a:ln>
+        </p:spPr>
+        <p:style>
+          <a:lnRef idx="1">
+            <a:schemeClr val="accent1"/>
+          </a:lnRef>
+          <a:fillRef idx="3">
+            <a:schemeClr val="accent1"/>
+          </a:fillRef>
+          <a:effectRef idx="2">
+            <a:schemeClr val="accent1"/>
+          </a:effectRef>
+          <a:fontRef idx="minor">
+            <a:schemeClr val="lt1"/>
+          </a:fontRef>
+        </p:style>
+        <p:txBody>
+          <a:bodyPr rtlCol="0" anchor="ctr"/>
+          <a:lstStyle/>
+          <a:p>
+            <a:pPr algn="ctr"/>
+          </a:p>
+        </p:txBody>
+      </p:sp>
+      <p:sp>
+        <p:nvSpPr>
+          <p:cNvPr id="16" name="Rounded Rectangle 15"/>
+          <p:cNvSpPr/>
+          <p:nvPr/>
+        </p:nvSpPr>
+        <p:spPr>
+          <a:xfrm>
+            <a:off x="5285232" y="1554480"/>
+            <a:ext cx="2148840" cy="2651760"/>
+          </a:xfrm>
+          <a:prstGeom prst="roundRect">
+            <a:avLst>
+              <a:gd name="adj" fmla="val 8000"/>
+            </a:avLst>
+          </a:prstGeom>
+          <a:solidFill>
+            <a:srgbClr val="FFFFFF"/>
+          </a:solidFill>
+          <a:ln w="9525">
+            <a:solidFill>
+              <a:srgbClr val="E2E8F0"/>
+            </a:solidFill>
+          </a:ln>
+          <a:effectLst/>
+        </p:spPr>
+        <p:style>
+          <a:lnRef idx="1">
+            <a:schemeClr val="accent1"/>
+          </a:lnRef>
+          <a:fillRef idx="3">
+            <a:schemeClr val="accent1"/>
+          </a:fillRef>
+          <a:effectRef idx="2">
+            <a:schemeClr val="accent1"/>
+          </a:effectRef>
+          <a:fontRef idx="minor">
+            <a:schemeClr val="lt1"/>
+          </a:fontRef>
+        </p:style>
+        <p:txBody>
+          <a:bodyPr rtlCol="0" anchor="ctr"/>
+          <a:lstStyle/>
+          <a:p>
+            <a:pPr algn="ctr"/>
+          </a:p>
+        </p:txBody>
+      </p:sp>
+      <p:sp>
+        <p:nvSpPr>
+          <p:cNvPr id="17" name="Oval 16"/>
+          <p:cNvSpPr/>
+          <p:nvPr/>
+        </p:nvSpPr>
+        <p:spPr>
+          <a:xfrm>
+            <a:off x="5422392" y="1691640"/>
+            <a:ext cx="329184" cy="329184"/>
+          </a:xfrm>
+          <a:prstGeom prst="ellipse">
+            <a:avLst/>
+          </a:prstGeom>
+          <a:solidFill>
+            <a:srgbClr val="1D4ED8"/>
+          </a:solidFill>
+          <a:ln>
+            <a:noFill/>
+          </a:ln>
+        </p:spPr>
+        <p:style>
+          <a:lnRef idx="1">
+            <a:schemeClr val="accent1"/>
+          </a:lnRef>
+          <a:fillRef idx="3">
+            <a:schemeClr val="accent1"/>
+          </a:fillRef>
+          <a:effectRef idx="2">
+            <a:schemeClr val="accent1"/>
+          </a:effectRef>
+          <a:fontRef idx="minor">
+            <a:schemeClr val="lt1"/>
+          </a:fontRef>
+        </p:style>
+        <p:txBody>
+          <a:bodyPr rtlCol="0" anchor="ctr" lIns="0" rIns="0" tIns="0" bIns="0"/>
+          <a:lstStyle/>
+          <a:p>
+            <a:pPr algn="ctr"/>
+            <a:r>
+              <a:rPr sz="1300" b="1">
+                <a:solidFill>
+                  <a:srgbClr val="FFFFFF"/>
+                </a:solidFill>
+                <a:latin typeface="Apple SD Gothic Neo"/>
+              </a:rPr>
+              <a:t>3</a:t>
+            </a:r>
+          </a:p>
+        </p:txBody>
+      </p:sp>
+      <p:sp>
+        <p:nvSpPr>
+          <p:cNvPr id="18" name="TextBox 17"/>
+          <p:cNvSpPr txBox="1"/>
+          <p:nvPr/>
+        </p:nvSpPr>
+        <p:spPr>
+          <a:xfrm>
+            <a:off x="5833872" y="1673352"/>
+            <a:ext cx="1508760" cy="365760"/>
+          </a:xfrm>
+          <a:prstGeom prst="rect">
+            <a:avLst/>
+          </a:prstGeom>
+          <a:noFill/>
+        </p:spPr>
+        <p:txBody>
+          <a:bodyPr wrap="square" anchor="t" lIns="45720" rIns="45720" tIns="27432" bIns="27432">
+            <a:spAutoFit/>
+          </a:bodyPr>
+          <a:lstStyle/>
+          <a:p>
+            <a:pPr algn="l">
+              <a:lnSpc>
+                <a:spcPct val="115000"/>
+              </a:lnSpc>
+            </a:pPr>
+            <a:r>
+              <a:rPr sz="1450" b="1">
+                <a:solidFill>
+                  <a:srgbClr val="0F172A"/>
+                </a:solidFill>
+                <a:latin typeface="Apple SD Gothic Neo"/>
+              </a:rPr>
+              <a:t>인수 촬영·확인</a:t>
+            </a:r>
+          </a:p>
+        </p:txBody>
+      </p:sp>
+      <p:sp>
+        <p:nvSpPr>
+          <p:cNvPr id="19" name="TextBox 18"/>
+          <p:cNvSpPr txBox="1"/>
+          <p:nvPr/>
+        </p:nvSpPr>
+        <p:spPr>
+          <a:xfrm>
+            <a:off x="5422392" y="2148840"/>
+            <a:ext cx="1874520" cy="1965960"/>
+          </a:xfrm>
+          <a:prstGeom prst="rect">
+            <a:avLst/>
+          </a:prstGeom>
+          <a:noFill/>
+        </p:spPr>
+        <p:txBody>
+          <a:bodyPr wrap="square" anchor="t" lIns="45720" rIns="45720" tIns="27432" bIns="27432">
+            <a:spAutoFit/>
+          </a:bodyPr>
+          <a:lstStyle/>
+          <a:p>
+            <a:pPr algn="l">
+              <a:lnSpc>
+                <a:spcPct val="120000"/>
+              </a:lnSpc>
+            </a:pPr>
+            <a:r>
+              <a:rPr sz="1200" b="0">
+                <a:solidFill>
+                  <a:srgbClr val="475569"/>
+                </a:solidFill>
+                <a:latin typeface="Apple SD Gothic Neo"/>
+              </a:rPr>
+              <a:t>직원(필요시 고객도) 사서함 촬영 → 자동 인증. 고객이 열어 보면 '미열람 0' = 인수 상태 확인 기록</a:t>
+            </a:r>
+          </a:p>
+        </p:txBody>
+      </p:sp>
+      <p:sp>
+        <p:nvSpPr>
+          <p:cNvPr id="20" name="Right Arrow 19"/>
+          <p:cNvSpPr/>
+          <p:nvPr/>
+        </p:nvSpPr>
+        <p:spPr>
+          <a:xfrm>
+            <a:off x="7452360" y="2770632"/>
+            <a:ext cx="182880" cy="219456"/>
+          </a:xfrm>
+          <a:prstGeom prst="rightArrow">
+            <a:avLst/>
+          </a:prstGeom>
+          <a:solidFill>
+            <a:srgbClr val="E2E8F0"/>
+          </a:solidFill>
+          <a:ln>
+            <a:noFill/>
+          </a:ln>
+        </p:spPr>
+        <p:style>
+          <a:lnRef idx="1">
+            <a:schemeClr val="accent1"/>
+          </a:lnRef>
+          <a:fillRef idx="3">
+            <a:schemeClr val="accent1"/>
+          </a:fillRef>
+          <a:effectRef idx="2">
+            <a:schemeClr val="accent1"/>
+          </a:effectRef>
+          <a:fontRef idx="minor">
+            <a:schemeClr val="lt1"/>
+          </a:fontRef>
+        </p:style>
+        <p:txBody>
+          <a:bodyPr rtlCol="0" anchor="ctr"/>
+          <a:lstStyle/>
+          <a:p>
+            <a:pPr algn="ctr"/>
+          </a:p>
+        </p:txBody>
+      </p:sp>
+      <p:sp>
+        <p:nvSpPr>
+          <p:cNvPr id="21" name="Rounded Rectangle 20"/>
+          <p:cNvSpPr/>
+          <p:nvPr/>
+        </p:nvSpPr>
+        <p:spPr>
+          <a:xfrm>
+            <a:off x="7653528" y="1554480"/>
+            <a:ext cx="2148840" cy="2651760"/>
+          </a:xfrm>
+          <a:prstGeom prst="roundRect">
+            <a:avLst>
+              <a:gd name="adj" fmla="val 8000"/>
+            </a:avLst>
+          </a:prstGeom>
+          <a:solidFill>
+            <a:srgbClr val="FFFFFF"/>
+          </a:solidFill>
+          <a:ln w="9525">
+            <a:solidFill>
+              <a:srgbClr val="E2E8F0"/>
+            </a:solidFill>
+          </a:ln>
+          <a:effectLst/>
+        </p:spPr>
+        <p:style>
+          <a:lnRef idx="1">
+            <a:schemeClr val="accent1"/>
+          </a:lnRef>
+          <a:fillRef idx="3">
+            <a:schemeClr val="accent1"/>
+          </a:fillRef>
+          <a:effectRef idx="2">
+            <a:schemeClr val="accent1"/>
+          </a:effectRef>
+          <a:fontRef idx="minor">
+            <a:schemeClr val="lt1"/>
+          </a:fontRef>
+        </p:style>
+        <p:txBody>
+          <a:bodyPr rtlCol="0" anchor="ctr"/>
+          <a:lstStyle/>
+          <a:p>
+            <a:pPr algn="ctr"/>
+          </a:p>
+        </p:txBody>
+      </p:sp>
+      <p:sp>
+        <p:nvSpPr>
+          <p:cNvPr id="22" name="Oval 21"/>
+          <p:cNvSpPr/>
+          <p:nvPr/>
+        </p:nvSpPr>
+        <p:spPr>
+          <a:xfrm>
+            <a:off x="7790688" y="1691640"/>
+            <a:ext cx="329184" cy="329184"/>
+          </a:xfrm>
+          <a:prstGeom prst="ellipse">
+            <a:avLst/>
+          </a:prstGeom>
+          <a:solidFill>
+            <a:srgbClr val="1D4ED8"/>
+          </a:solidFill>
+          <a:ln>
+            <a:noFill/>
+          </a:ln>
+        </p:spPr>
+        <p:style>
+          <a:lnRef idx="1">
+            <a:schemeClr val="accent1"/>
+          </a:lnRef>
+          <a:fillRef idx="3">
+            <a:schemeClr val="accent1"/>
+          </a:fillRef>
+          <a:effectRef idx="2">
+            <a:schemeClr val="accent1"/>
+          </a:effectRef>
+          <a:fontRef idx="minor">
+            <a:schemeClr val="lt1"/>
+          </a:fontRef>
+        </p:style>
+        <p:txBody>
+          <a:bodyPr rtlCol="0" anchor="ctr" lIns="0" rIns="0" tIns="0" bIns="0"/>
+          <a:lstStyle/>
+          <a:p>
+            <a:pPr algn="ctr"/>
+            <a:r>
+              <a:rPr sz="1300" b="1">
+                <a:solidFill>
+                  <a:srgbClr val="FFFFFF"/>
+                </a:solidFill>
+                <a:latin typeface="Apple SD Gothic Neo"/>
+              </a:rPr>
+              <a:t>4</a:t>
+            </a:r>
+          </a:p>
+        </p:txBody>
+      </p:sp>
+      <p:sp>
+        <p:nvSpPr>
+          <p:cNvPr id="23" name="TextBox 22"/>
+          <p:cNvSpPr txBox="1"/>
+          <p:nvPr/>
+        </p:nvSpPr>
+        <p:spPr>
+          <a:xfrm>
+            <a:off x="8202168" y="1673352"/>
+            <a:ext cx="1508760" cy="365760"/>
+          </a:xfrm>
+          <a:prstGeom prst="rect">
+            <a:avLst/>
+          </a:prstGeom>
+          <a:noFill/>
+        </p:spPr>
+        <p:txBody>
+          <a:bodyPr wrap="square" anchor="t" lIns="45720" rIns="45720" tIns="27432" bIns="27432">
+            <a:spAutoFit/>
+          </a:bodyPr>
+          <a:lstStyle/>
+          <a:p>
+            <a:pPr algn="l">
+              <a:lnSpc>
+                <a:spcPct val="115000"/>
+              </a:lnSpc>
+            </a:pPr>
+            <a:r>
+              <a:rPr sz="1450" b="1">
+                <a:solidFill>
+                  <a:srgbClr val="0F172A"/>
+                </a:solidFill>
+                <a:latin typeface="Apple SD Gothic Neo"/>
+              </a:rPr>
+              <a:t>반납 촬영·잠금</a:t>
+            </a:r>
+          </a:p>
+        </p:txBody>
+      </p:sp>
+      <p:sp>
+        <p:nvSpPr>
+          <p:cNvPr id="24" name="TextBox 23"/>
+          <p:cNvSpPr txBox="1"/>
+          <p:nvPr/>
+        </p:nvSpPr>
+        <p:spPr>
+          <a:xfrm>
+            <a:off x="7790688" y="2148840"/>
+            <a:ext cx="1874520" cy="1965960"/>
+          </a:xfrm>
+          <a:prstGeom prst="rect">
+            <a:avLst/>
+          </a:prstGeom>
+          <a:noFill/>
+        </p:spPr>
+        <p:txBody>
+          <a:bodyPr wrap="square" anchor="t" lIns="45720" rIns="45720" tIns="27432" bIns="27432">
+            <a:spAutoFit/>
+          </a:bodyPr>
+          <a:lstStyle/>
+          <a:p>
+            <a:pPr algn="l">
+              <a:lnSpc>
+                <a:spcPct val="120000"/>
+              </a:lnSpc>
+            </a:pPr>
+            <a:r>
+              <a:rPr sz="1200" b="0">
+                <a:solidFill>
+                  <a:srgbClr val="475569"/>
+                </a:solidFill>
+                <a:latin typeface="Apple SD Gothic Neo"/>
+              </a:rPr>
+              <a:t>같은 사서함에 반납 촬영. 새 손상은 인수·반납 사진을 나란히. 정산 후 잠금(읽기 전용)</a:t>
+            </a:r>
+          </a:p>
+        </p:txBody>
+      </p:sp>
+      <p:sp>
+        <p:nvSpPr>
+          <p:cNvPr id="25" name="Right Arrow 24"/>
+          <p:cNvSpPr/>
+          <p:nvPr/>
+        </p:nvSpPr>
+        <p:spPr>
+          <a:xfrm>
+            <a:off x="9820656" y="2770632"/>
+            <a:ext cx="182880" cy="219456"/>
+          </a:xfrm>
+          <a:prstGeom prst="rightArrow">
+            <a:avLst/>
+          </a:prstGeom>
+          <a:solidFill>
+            <a:srgbClr val="E2E8F0"/>
+          </a:solidFill>
+          <a:ln>
+            <a:noFill/>
+          </a:ln>
+        </p:spPr>
+        <p:style>
+          <a:lnRef idx="1">
+            <a:schemeClr val="accent1"/>
+          </a:lnRef>
+          <a:fillRef idx="3">
+            <a:schemeClr val="accent1"/>
+          </a:fillRef>
+          <a:effectRef idx="2">
+            <a:schemeClr val="accent1"/>
+          </a:effectRef>
+          <a:fontRef idx="minor">
+            <a:schemeClr val="lt1"/>
+          </a:fontRef>
+        </p:style>
+        <p:txBody>
+          <a:bodyPr rtlCol="0" anchor="ctr"/>
+          <a:lstStyle/>
+          <a:p>
+            <a:pPr algn="ctr"/>
+          </a:p>
+        </p:txBody>
+      </p:sp>
+      <p:sp>
+        <p:nvSpPr>
+          <p:cNvPr id="26" name="Rounded Rectangle 25"/>
+          <p:cNvSpPr/>
+          <p:nvPr/>
+        </p:nvSpPr>
+        <p:spPr>
+          <a:xfrm>
+            <a:off x="10021824" y="1554480"/>
+            <a:ext cx="2148840" cy="2651760"/>
           </a:xfrm>
           <a:prstGeom prst="roundRect">
             <a:avLst>
@@ -10042,14 +10829,66 @@
       </p:sp>
       <p:sp>
         <p:nvSpPr>
-          <p:cNvPr id="7" name="TextBox 6"/>
+          <p:cNvPr id="27" name="Oval 26"/>
+          <p:cNvSpPr/>
+          <p:nvPr/>
+        </p:nvSpPr>
+        <p:spPr>
+          <a:xfrm>
+            <a:off x="10158984" y="1691640"/>
+            <a:ext cx="329184" cy="329184"/>
+          </a:xfrm>
+          <a:prstGeom prst="ellipse">
+            <a:avLst/>
+          </a:prstGeom>
+          <a:solidFill>
+            <a:srgbClr val="1D4ED8"/>
+          </a:solidFill>
+          <a:ln>
+            <a:noFill/>
+          </a:ln>
+        </p:spPr>
+        <p:style>
+          <a:lnRef idx="1">
+            <a:schemeClr val="accent1"/>
+          </a:lnRef>
+          <a:fillRef idx="3">
+            <a:schemeClr val="accent1"/>
+          </a:fillRef>
+          <a:effectRef idx="2">
+            <a:schemeClr val="accent1"/>
+          </a:effectRef>
+          <a:fontRef idx="minor">
+            <a:schemeClr val="lt1"/>
+          </a:fontRef>
+        </p:style>
+        <p:txBody>
+          <a:bodyPr rtlCol="0" anchor="ctr" lIns="0" rIns="0" tIns="0" bIns="0"/>
+          <a:lstStyle/>
+          <a:p>
+            <a:pPr algn="ctr"/>
+            <a:r>
+              <a:rPr sz="1300" b="1">
+                <a:solidFill>
+                  <a:srgbClr val="FFFFFF"/>
+                </a:solidFill>
+                <a:latin typeface="Apple SD Gothic Neo"/>
+              </a:rPr>
+              <a:t>5</a:t>
+            </a:r>
+          </a:p>
+        </p:txBody>
+      </p:sp>
+      <p:sp>
+        <p:nvSpPr>
+          <p:cNvPr id="28" name="TextBox 27"/>
           <p:cNvSpPr txBox="1"/>
           <p:nvPr/>
         </p:nvSpPr>
         <p:spPr>
           <a:xfrm>
-            <a:off x="685800" y="1645920"/>
-            <a:ext cx="3291840" cy="411480"/>
+            <a:off x="10570464" y="1673352"/>
+            <a:ext cx="1508760" cy="365760"/>
           </a:xfrm>
           <a:prstGeom prst="rect">
             <a:avLst/>
@@ -10074,21 +10913,21 @@
                 </a:solidFill>
                 <a:latin typeface="Apple SD Gothic Neo"/>
               </a:rPr>
-              <a:t>분쟁 중재 비용 감소</a:t>
-            </a:r>
-          </a:p>
-        </p:txBody>
-      </p:sp>
-      <p:sp>
-        <p:nvSpPr>
-          <p:cNvPr id="8" name="TextBox 7"/>
+              <a:t>분쟁 판단</a:t>
+            </a:r>
+          </a:p>
+        </p:txBody>
+      </p:sp>
+      <p:sp>
+        <p:nvSpPr>
+          <p:cNvPr id="29" name="TextBox 28"/>
           <p:cNvSpPr txBox="1"/>
           <p:nvPr/>
         </p:nvSpPr>
         <p:spPr>
           <a:xfrm>
-            <a:off x="685800" y="2057400"/>
-            <a:ext cx="3291840" cy="1371600"/>
+            <a:off x="10158984" y="2148840"/>
+            <a:ext cx="1874520" cy="1965960"/>
           </a:xfrm>
           <a:prstGeom prst="rect">
             <a:avLst/>
@@ -10107,27 +10946,27 @@
               </a:lnSpc>
             </a:pPr>
             <a:r>
-              <a:rPr sz="1300" b="0">
+              <a:rPr sz="1200" b="0">
                 <a:solidFill>
                   <a:srgbClr val="475569"/>
                 </a:solidFill>
                 <a:latin typeface="Apple SD Gothic Neo"/>
               </a:rPr>
-              <a:t>CS가 인수·반납 링크 두 개로 판단. '언제 찍었나' 논쟁 자체가 사라짐</a:t>
-            </a:r>
-          </a:p>
-        </p:txBody>
-      </p:sp>
-      <p:sp>
-        <p:nvSpPr>
-          <p:cNvPr id="9" name="Rounded Rectangle 8"/>
+              <a:t>CS가 웹에서 사서함 열람 또는 확인서 PDF 확인 — 시각·좌표·원본·열람 기록으로 판단. 과태료는 반납 시각으로 이용자 특정</a:t>
+            </a:r>
+          </a:p>
+        </p:txBody>
+      </p:sp>
+      <p:sp>
+        <p:nvSpPr>
+          <p:cNvPr id="30" name="Rounded Rectangle 29"/>
           <p:cNvSpPr/>
           <p:nvPr/>
         </p:nvSpPr>
         <p:spPr>
           <a:xfrm>
-            <a:off x="4297679" y="1554480"/>
-            <a:ext cx="3566160" cy="1965960"/>
+            <a:off x="548640" y="4480560"/>
+            <a:ext cx="11064240" cy="1463040"/>
           </a:xfrm>
           <a:prstGeom prst="roundRect">
             <a:avLst>
@@ -10135,7 +10974,7 @@
             </a:avLst>
           </a:prstGeom>
           <a:solidFill>
-            <a:srgbClr val="FFFFFF"/>
+            <a:srgbClr val="F1F5F9"/>
           </a:solidFill>
           <a:ln w="9525">
             <a:solidFill>
@@ -10168,14 +11007,14 @@
       </p:sp>
       <p:sp>
         <p:nvSpPr>
-          <p:cNvPr id="10" name="TextBox 9"/>
+          <p:cNvPr id="31" name="TextBox 30"/>
           <p:cNvSpPr txBox="1"/>
           <p:nvPr/>
         </p:nvSpPr>
         <p:spPr>
           <a:xfrm>
-            <a:off x="4434839" y="1645920"/>
-            <a:ext cx="3291840" cy="411480"/>
+            <a:off x="731520" y="4572000"/>
+            <a:ext cx="10789920" cy="1280160"/>
           </a:xfrm>
           <a:prstGeom prst="rect">
             <a:avLst/>
@@ -10190,560 +11029,39 @@
           <a:p>
             <a:pPr algn="l">
               <a:lnSpc>
-                <a:spcPct val="115000"/>
-              </a:lnSpc>
-            </a:pPr>
-            <a:r>
-              <a:rPr sz="1500" b="1">
-                <a:solidFill>
-                  <a:srgbClr val="0F172A"/>
-                </a:solidFill>
-                <a:latin typeface="Apple SD Gothic Neo"/>
-              </a:rPr>
-              <a:t>리뷰 신뢰 지표 개선</a:t>
-            </a:r>
-          </a:p>
-        </p:txBody>
-      </p:sp>
-      <p:sp>
-        <p:nvSpPr>
-          <p:cNvPr id="11" name="TextBox 10"/>
-          <p:cNvSpPr txBox="1"/>
-          <p:nvPr/>
-        </p:nvSpPr>
-        <p:spPr>
-          <a:xfrm>
-            <a:off x="4434839" y="2057400"/>
-            <a:ext cx="3291840" cy="1371600"/>
-          </a:xfrm>
-          <a:prstGeom prst="rect">
-            <a:avLst/>
-          </a:prstGeom>
-          <a:noFill/>
-        </p:spPr>
-        <p:txBody>
-          <a:bodyPr wrap="square" anchor="t" lIns="45720" rIns="45720" tIns="27432" bIns="27432">
-            <a:spAutoFit/>
-          </a:bodyPr>
-          <a:lstStyle/>
-          <a:p>
-            <a:pPr algn="l">
-              <a:lnSpc>
-                <a:spcPct val="120000"/>
-              </a:lnSpc>
-            </a:pPr>
-            <a:r>
-              <a:rPr sz="1300" b="0">
+                <a:spcPct val="125000"/>
+              </a:lnSpc>
+            </a:pPr>
+            <a:r>
+              <a:rPr sz="1200" b="0">
                 <a:solidFill>
                   <a:srgbClr val="475569"/>
                 </a:solidFill>
                 <a:latin typeface="Apple SD Gothic Neo"/>
               </a:rPr>
-              <a:t>흠집·과태료 분쟁 후기('기스 20~50만 원', '과태료 2달 뒤 통보') 감소 → 리뷰 시스템 신뢰 강화</a:t>
-            </a:r>
-          </a:p>
-        </p:txBody>
-      </p:sp>
-      <p:sp>
-        <p:nvSpPr>
-          <p:cNvPr id="12" name="Rounded Rectangle 11"/>
-          <p:cNvSpPr/>
-          <p:nvPr/>
-        </p:nvSpPr>
-        <p:spPr>
-          <a:xfrm>
-            <a:off x="8046718" y="1554480"/>
-            <a:ext cx="3566160" cy="1965960"/>
-          </a:xfrm>
-          <a:prstGeom prst="roundRect">
-            <a:avLst>
-              <a:gd name="adj" fmla="val 8000"/>
-            </a:avLst>
-          </a:prstGeom>
-          <a:solidFill>
-            <a:srgbClr val="ECFDF5"/>
-          </a:solidFill>
-          <a:ln w="9525">
-            <a:solidFill>
-              <a:srgbClr val="E2E8F0"/>
-            </a:solidFill>
-          </a:ln>
-          <a:effectLst/>
-        </p:spPr>
-        <p:style>
-          <a:lnRef idx="1">
-            <a:schemeClr val="accent1"/>
-          </a:lnRef>
-          <a:fillRef idx="3">
-            <a:schemeClr val="accent1"/>
-          </a:fillRef>
-          <a:effectRef idx="2">
-            <a:schemeClr val="accent1"/>
-          </a:effectRef>
-          <a:fontRef idx="minor">
-            <a:schemeClr val="lt1"/>
-          </a:fontRef>
-        </p:style>
-        <p:txBody>
-          <a:bodyPr rtlCol="0" anchor="ctr"/>
-          <a:lstStyle/>
-          <a:p>
-            <a:pPr algn="ctr"/>
-          </a:p>
-        </p:txBody>
-      </p:sp>
-      <p:sp>
-        <p:nvSpPr>
-          <p:cNvPr id="13" name="TextBox 12"/>
-          <p:cNvSpPr txBox="1"/>
-          <p:nvPr/>
-        </p:nvSpPr>
-        <p:spPr>
-          <a:xfrm>
-            <a:off x="8183878" y="1645920"/>
-            <a:ext cx="3291840" cy="411480"/>
-          </a:xfrm>
-          <a:prstGeom prst="rect">
-            <a:avLst/>
-          </a:prstGeom>
-          <a:noFill/>
-        </p:spPr>
-        <p:txBody>
-          <a:bodyPr wrap="square" anchor="t" lIns="45720" rIns="45720" tIns="27432" bIns="27432">
-            <a:spAutoFit/>
-          </a:bodyPr>
-          <a:lstStyle/>
-          <a:p>
-            <a:pPr algn="l">
-              <a:lnSpc>
-                <a:spcPct val="115000"/>
-              </a:lnSpc>
-            </a:pPr>
-            <a:r>
-              <a:rPr sz="1500" b="1">
-                <a:solidFill>
-                  <a:srgbClr val="047857"/>
-                </a:solidFill>
-                <a:latin typeface="Apple SD Gothic Neo"/>
-              </a:rPr>
-              <a:t>600개 업체 락인</a:t>
-            </a:r>
-          </a:p>
-        </p:txBody>
-      </p:sp>
-      <p:sp>
-        <p:nvSpPr>
-          <p:cNvPr id="14" name="TextBox 13"/>
-          <p:cNvSpPr txBox="1"/>
-          <p:nvPr/>
-        </p:nvSpPr>
-        <p:spPr>
-          <a:xfrm>
-            <a:off x="8183878" y="2057400"/>
-            <a:ext cx="3291840" cy="1371600"/>
-          </a:xfrm>
-          <a:prstGeom prst="rect">
-            <a:avLst/>
-          </a:prstGeom>
-          <a:noFill/>
-        </p:spPr>
-        <p:txBody>
-          <a:bodyPr wrap="square" anchor="t" lIns="45720" rIns="45720" tIns="27432" bIns="27432">
-            <a:spAutoFit/>
-          </a:bodyPr>
-          <a:lstStyle/>
-          <a:p>
-            <a:pPr algn="l">
-              <a:lnSpc>
-                <a:spcPct val="120000"/>
-              </a:lnSpc>
-            </a:pPr>
-            <a:r>
-              <a:rPr sz="1300" b="0">
+              <a:t>• 카모아 앱·파트너스 화면은 1단계에서 바뀌지 않습니다. 바뀌는 것은 '사진에 붙은 정보'와 '사진이 모이는 곳(사서함)', 그리고 '고객이 봤다는 기록'입니다.</a:t>
+            </a:r>
+          </a:p>
+          <a:p>
+            <a:pPr algn="l"/>
+            <a:r>
+              <a:rPr sz="1200" b="0">
                 <a:solidFill>
                   <a:srgbClr val="475569"/>
                 </a:solidFill>
-                <a:latin typeface="Apple SD Gothic Neo"/>
-              </a:rPr>
-              <a:t>무료 ERP에 '검증 사진' 기능이 더해져 경쟁 플랫폼 이탈 유인 감소</a:t>
-            </a:r>
-          </a:p>
-        </p:txBody>
-      </p:sp>
-      <p:sp>
-        <p:nvSpPr>
-          <p:cNvPr id="15" name="Rounded Rectangle 14"/>
-          <p:cNvSpPr/>
-          <p:nvPr/>
-        </p:nvSpPr>
-        <p:spPr>
-          <a:xfrm>
-            <a:off x="548640" y="3703320"/>
-            <a:ext cx="3566160" cy="1965960"/>
-          </a:xfrm>
-          <a:prstGeom prst="roundRect">
-            <a:avLst>
-              <a:gd name="adj" fmla="val 8000"/>
-            </a:avLst>
-          </a:prstGeom>
-          <a:solidFill>
-            <a:srgbClr val="FFFFFF"/>
-          </a:solidFill>
-          <a:ln w="9525">
-            <a:solidFill>
-              <a:srgbClr val="E2E8F0"/>
-            </a:solidFill>
-          </a:ln>
-          <a:effectLst/>
-        </p:spPr>
-        <p:style>
-          <a:lnRef idx="1">
-            <a:schemeClr val="accent1"/>
-          </a:lnRef>
-          <a:fillRef idx="3">
-            <a:schemeClr val="accent1"/>
-          </a:fillRef>
-          <a:effectRef idx="2">
-            <a:schemeClr val="accent1"/>
-          </a:effectRef>
-          <a:fontRef idx="minor">
-            <a:schemeClr val="lt1"/>
-          </a:fontRef>
-        </p:style>
-        <p:txBody>
-          <a:bodyPr rtlCol="0" anchor="ctr"/>
-          <a:lstStyle/>
-          <a:p>
-            <a:pPr algn="ctr"/>
-          </a:p>
-        </p:txBody>
-      </p:sp>
-      <p:sp>
-        <p:nvSpPr>
-          <p:cNvPr id="16" name="TextBox 15"/>
-          <p:cNvSpPr txBox="1"/>
-          <p:nvPr/>
-        </p:nvSpPr>
-        <p:spPr>
-          <a:xfrm>
-            <a:off x="685800" y="3794760"/>
-            <a:ext cx="3291840" cy="411480"/>
-          </a:xfrm>
-          <a:prstGeom prst="rect">
-            <a:avLst/>
-          </a:prstGeom>
-          <a:noFill/>
-        </p:spPr>
-        <p:txBody>
-          <a:bodyPr wrap="square" anchor="t" lIns="45720" rIns="45720" tIns="27432" bIns="27432">
-            <a:spAutoFit/>
-          </a:bodyPr>
-          <a:lstStyle/>
-          <a:p>
-            <a:pPr algn="l">
-              <a:lnSpc>
-                <a:spcPct val="115000"/>
-              </a:lnSpc>
-            </a:pPr>
-            <a:r>
-              <a:rPr sz="1500" b="1">
-                <a:solidFill>
-                  <a:srgbClr val="0F172A"/>
-                </a:solidFill>
-                <a:latin typeface="Apple SD Gothic Neo"/>
-              </a:rPr>
-              <a:t>업체 손실 방어</a:t>
-            </a:r>
-          </a:p>
-        </p:txBody>
-      </p:sp>
-      <p:sp>
-        <p:nvSpPr>
-          <p:cNvPr id="17" name="TextBox 16"/>
-          <p:cNvSpPr txBox="1"/>
-          <p:nvPr/>
-        </p:nvSpPr>
-        <p:spPr>
-          <a:xfrm>
-            <a:off x="685800" y="4206240"/>
-            <a:ext cx="3291840" cy="1371600"/>
-          </a:xfrm>
-          <a:prstGeom prst="rect">
-            <a:avLst/>
-          </a:prstGeom>
-          <a:noFill/>
-        </p:spPr>
-        <p:txBody>
-          <a:bodyPr wrap="square" anchor="t" lIns="45720" rIns="45720" tIns="27432" bIns="27432">
-            <a:spAutoFit/>
-          </a:bodyPr>
-          <a:lstStyle/>
-          <a:p>
-            <a:pPr algn="l">
-              <a:lnSpc>
-                <a:spcPct val="120000"/>
-              </a:lnSpc>
-            </a:pPr>
-            <a:r>
-              <a:rPr sz="1300" b="0">
+              </a:rPr>
+              <a:t>• 고객 참여는 예약 확정 안내에 초대 안내 한 줄(또는 카운터 QR)만 있으면 됩니다. 사서함 번호·비밀번호 배포는 필요 없습니다.</a:t>
+            </a:r>
+          </a:p>
+          <a:p>
+            <a:pPr algn="l"/>
+            <a:r>
+              <a:rPr sz="1200" b="0">
                 <a:solidFill>
                   <a:srgbClr val="475569"/>
                 </a:solidFill>
-                <a:latin typeface="Apple SD Gothic Neo"/>
-              </a:rPr>
-              <a:t>과태료(서울 적발 1위 업종=렌터카)·손상 청구의 근거 확보 → 업체 만족도</a:t>
-            </a:r>
-          </a:p>
-        </p:txBody>
-      </p:sp>
-      <p:sp>
-        <p:nvSpPr>
-          <p:cNvPr id="18" name="Rounded Rectangle 17"/>
-          <p:cNvSpPr/>
-          <p:nvPr/>
-        </p:nvSpPr>
-        <p:spPr>
-          <a:xfrm>
-            <a:off x="4297679" y="3703320"/>
-            <a:ext cx="3566160" cy="1965960"/>
-          </a:xfrm>
-          <a:prstGeom prst="roundRect">
-            <a:avLst>
-              <a:gd name="adj" fmla="val 8000"/>
-            </a:avLst>
-          </a:prstGeom>
-          <a:solidFill>
-            <a:srgbClr val="FFFFFF"/>
-          </a:solidFill>
-          <a:ln w="9525">
-            <a:solidFill>
-              <a:srgbClr val="E2E8F0"/>
-            </a:solidFill>
-          </a:ln>
-          <a:effectLst/>
-        </p:spPr>
-        <p:style>
-          <a:lnRef idx="1">
-            <a:schemeClr val="accent1"/>
-          </a:lnRef>
-          <a:fillRef idx="3">
-            <a:schemeClr val="accent1"/>
-          </a:fillRef>
-          <a:effectRef idx="2">
-            <a:schemeClr val="accent1"/>
-          </a:effectRef>
-          <a:fontRef idx="minor">
-            <a:schemeClr val="lt1"/>
-          </a:fontRef>
-        </p:style>
-        <p:txBody>
-          <a:bodyPr rtlCol="0" anchor="ctr"/>
-          <a:lstStyle/>
-          <a:p>
-            <a:pPr algn="ctr"/>
-          </a:p>
-        </p:txBody>
-      </p:sp>
-      <p:sp>
-        <p:nvSpPr>
-          <p:cNvPr id="19" name="TextBox 18"/>
-          <p:cNvSpPr txBox="1"/>
-          <p:nvPr/>
-        </p:nvSpPr>
-        <p:spPr>
-          <a:xfrm>
-            <a:off x="4434839" y="3794760"/>
-            <a:ext cx="3291840" cy="411480"/>
-          </a:xfrm>
-          <a:prstGeom prst="rect">
-            <a:avLst/>
-          </a:prstGeom>
-          <a:noFill/>
-        </p:spPr>
-        <p:txBody>
-          <a:bodyPr wrap="square" anchor="t" lIns="45720" rIns="45720" tIns="27432" bIns="27432">
-            <a:spAutoFit/>
-          </a:bodyPr>
-          <a:lstStyle/>
-          <a:p>
-            <a:pPr algn="l">
-              <a:lnSpc>
-                <a:spcPct val="115000"/>
-              </a:lnSpc>
-            </a:pPr>
-            <a:r>
-              <a:rPr sz="1500" b="1">
-                <a:solidFill>
-                  <a:srgbClr val="0F172A"/>
-                </a:solidFill>
-                <a:latin typeface="Apple SD Gothic Neo"/>
-              </a:rPr>
-              <a:t>보도·마케팅 소재</a:t>
-            </a:r>
-          </a:p>
-        </p:txBody>
-      </p:sp>
-      <p:sp>
-        <p:nvSpPr>
-          <p:cNvPr id="20" name="TextBox 19"/>
-          <p:cNvSpPr txBox="1"/>
-          <p:nvPr/>
-        </p:nvSpPr>
-        <p:spPr>
-          <a:xfrm>
-            <a:off x="4434839" y="4206240"/>
-            <a:ext cx="3291840" cy="1371600"/>
-          </a:xfrm>
-          <a:prstGeom prst="rect">
-            <a:avLst/>
-          </a:prstGeom>
-          <a:noFill/>
-        </p:spPr>
-        <p:txBody>
-          <a:bodyPr wrap="square" anchor="t" lIns="45720" rIns="45720" tIns="27432" bIns="27432">
-            <a:spAutoFit/>
-          </a:bodyPr>
-          <a:lstStyle/>
-          <a:p>
-            <a:pPr algn="l">
-              <a:lnSpc>
-                <a:spcPct val="120000"/>
-              </a:lnSpc>
-            </a:pPr>
-            <a:r>
-              <a:rPr sz="1300" b="0">
-                <a:solidFill>
-                  <a:srgbClr val="475569"/>
-                </a:solidFill>
-                <a:latin typeface="Apple SD Gothic Neo"/>
-              </a:rPr>
-              <a:t>'C2PA 적합성 인증 제품을 채택한 첫 렌터카 플랫폼' — 신뢰를 파는 플랫폼에 맞는 메시지</a:t>
-            </a:r>
-          </a:p>
-        </p:txBody>
-      </p:sp>
-      <p:sp>
-        <p:nvSpPr>
-          <p:cNvPr id="21" name="Rounded Rectangle 20"/>
-          <p:cNvSpPr/>
-          <p:nvPr/>
-        </p:nvSpPr>
-        <p:spPr>
-          <a:xfrm>
-            <a:off x="8046718" y="3703320"/>
-            <a:ext cx="3566160" cy="1965960"/>
-          </a:xfrm>
-          <a:prstGeom prst="roundRect">
-            <a:avLst>
-              <a:gd name="adj" fmla="val 8000"/>
-            </a:avLst>
-          </a:prstGeom>
-          <a:solidFill>
-            <a:srgbClr val="FFFFFF"/>
-          </a:solidFill>
-          <a:ln w="9525">
-            <a:solidFill>
-              <a:srgbClr val="E2E8F0"/>
-            </a:solidFill>
-          </a:ln>
-          <a:effectLst/>
-        </p:spPr>
-        <p:style>
-          <a:lnRef idx="1">
-            <a:schemeClr val="accent1"/>
-          </a:lnRef>
-          <a:fillRef idx="3">
-            <a:schemeClr val="accent1"/>
-          </a:fillRef>
-          <a:effectRef idx="2">
-            <a:schemeClr val="accent1"/>
-          </a:effectRef>
-          <a:fontRef idx="minor">
-            <a:schemeClr val="lt1"/>
-          </a:fontRef>
-        </p:style>
-        <p:txBody>
-          <a:bodyPr rtlCol="0" anchor="ctr"/>
-          <a:lstStyle/>
-          <a:p>
-            <a:pPr algn="ctr"/>
-          </a:p>
-        </p:txBody>
-      </p:sp>
-      <p:sp>
-        <p:nvSpPr>
-          <p:cNvPr id="22" name="TextBox 21"/>
-          <p:cNvSpPr txBox="1"/>
-          <p:nvPr/>
-        </p:nvSpPr>
-        <p:spPr>
-          <a:xfrm>
-            <a:off x="8183878" y="3794760"/>
-            <a:ext cx="3291840" cy="411480"/>
-          </a:xfrm>
-          <a:prstGeom prst="rect">
-            <a:avLst/>
-          </a:prstGeom>
-          <a:noFill/>
-        </p:spPr>
-        <p:txBody>
-          <a:bodyPr wrap="square" anchor="t" lIns="45720" rIns="45720" tIns="27432" bIns="27432">
-            <a:spAutoFit/>
-          </a:bodyPr>
-          <a:lstStyle/>
-          <a:p>
-            <a:pPr algn="l">
-              <a:lnSpc>
-                <a:spcPct val="115000"/>
-              </a:lnSpc>
-            </a:pPr>
-            <a:r>
-              <a:rPr sz="1500" b="1">
-                <a:solidFill>
-                  <a:srgbClr val="0F172A"/>
-                </a:solidFill>
-                <a:latin typeface="Apple SD Gothic Neo"/>
-              </a:rPr>
-              <a:t>개발 없이, 비용 없이</a:t>
-            </a:r>
-          </a:p>
-        </p:txBody>
-      </p:sp>
-      <p:sp>
-        <p:nvSpPr>
-          <p:cNvPr id="23" name="TextBox 22"/>
-          <p:cNvSpPr txBox="1"/>
-          <p:nvPr/>
-        </p:nvSpPr>
-        <p:spPr>
-          <a:xfrm>
-            <a:off x="8183878" y="4206240"/>
-            <a:ext cx="3291840" cy="1371600"/>
-          </a:xfrm>
-          <a:prstGeom prst="rect">
-            <a:avLst/>
-          </a:prstGeom>
-          <a:noFill/>
-        </p:spPr>
-        <p:txBody>
-          <a:bodyPr wrap="square" anchor="t" lIns="45720" rIns="45720" tIns="27432" bIns="27432">
-            <a:spAutoFit/>
-          </a:bodyPr>
-          <a:lstStyle/>
-          <a:p>
-            <a:pPr algn="l">
-              <a:lnSpc>
-                <a:spcPct val="120000"/>
-              </a:lnSpc>
-            </a:pPr>
-            <a:r>
-              <a:rPr sz="1300" b="0">
-                <a:solidFill>
-                  <a:srgbClr val="475569"/>
-                </a:solidFill>
-                <a:latin typeface="Apple SD Gothic Neo"/>
-              </a:rPr>
-              <a:t>자체 개발 시 기기 검증·원본 판정·C2PA 서명 각각 수개월. 파일럿은 공지 한 번과 메일 수신처 하나</a:t>
+              </a:rPr>
+              <a:t>• 예약번호는 1단계에서 사서함 이름에 직원이 입력 → 2단계에서 예약 생성 시 자동 개설.</a:t>
             </a:r>
           </a:p>
         </p:txBody>
@@ -10843,7 +11161,7 @@
                 </a:solidFill>
                 <a:latin typeface="Apple SD Gothic Neo"/>
               </a:rPr>
-              <a:t>PHASE 2 &amp; PRICING</a:t>
+              <a:t>BENEFITS FOR CARMORE</a:t>
             </a:r>
           </a:p>
         </p:txBody>
@@ -10882,7 +11200,7 @@
                 </a:solidFill>
                 <a:latin typeface="Apple SD Gothic Neo"/>
               </a:rPr>
-              <a:t>2단계 연동 옵션과 요금 모델</a:t>
+              <a:t>카모아가 얻는 것</a:t>
             </a:r>
           </a:p>
         </p:txBody>
@@ -10935,7 +11253,133 @@
         <p:spPr>
           <a:xfrm>
             <a:off x="548640" y="1554480"/>
-            <a:ext cx="5394960" cy="2651760"/>
+            <a:ext cx="3566160" cy="1965960"/>
+          </a:xfrm>
+          <a:prstGeom prst="roundRect">
+            <a:avLst>
+              <a:gd name="adj" fmla="val 8000"/>
+            </a:avLst>
+          </a:prstGeom>
+          <a:solidFill>
+            <a:srgbClr val="ECFDF5"/>
+          </a:solidFill>
+          <a:ln w="9525">
+            <a:solidFill>
+              <a:srgbClr val="E2E8F0"/>
+            </a:solidFill>
+          </a:ln>
+          <a:effectLst/>
+        </p:spPr>
+        <p:style>
+          <a:lnRef idx="1">
+            <a:schemeClr val="accent1"/>
+          </a:lnRef>
+          <a:fillRef idx="3">
+            <a:schemeClr val="accent1"/>
+          </a:fillRef>
+          <a:effectRef idx="2">
+            <a:schemeClr val="accent1"/>
+          </a:effectRef>
+          <a:fontRef idx="minor">
+            <a:schemeClr val="lt1"/>
+          </a:fontRef>
+        </p:style>
+        <p:txBody>
+          <a:bodyPr rtlCol="0" anchor="ctr"/>
+          <a:lstStyle/>
+          <a:p>
+            <a:pPr algn="ctr"/>
+          </a:p>
+        </p:txBody>
+      </p:sp>
+      <p:sp>
+        <p:nvSpPr>
+          <p:cNvPr id="7" name="TextBox 6"/>
+          <p:cNvSpPr txBox="1"/>
+          <p:nvPr/>
+        </p:nvSpPr>
+        <p:spPr>
+          <a:xfrm>
+            <a:off x="685800" y="1645920"/>
+            <a:ext cx="3291840" cy="411480"/>
+          </a:xfrm>
+          <a:prstGeom prst="rect">
+            <a:avLst/>
+          </a:prstGeom>
+          <a:noFill/>
+        </p:spPr>
+        <p:txBody>
+          <a:bodyPr wrap="square" anchor="t" lIns="45720" rIns="45720" tIns="27432" bIns="27432">
+            <a:spAutoFit/>
+          </a:bodyPr>
+          <a:lstStyle/>
+          <a:p>
+            <a:pPr algn="l">
+              <a:lnSpc>
+                <a:spcPct val="115000"/>
+              </a:lnSpc>
+            </a:pPr>
+            <a:r>
+              <a:rPr sz="1500" b="1">
+                <a:solidFill>
+                  <a:srgbClr val="047857"/>
+                </a:solidFill>
+                <a:latin typeface="Apple SD Gothic Neo"/>
+              </a:rPr>
+              <a:t>분쟁 중재 비용 감소</a:t>
+            </a:r>
+          </a:p>
+        </p:txBody>
+      </p:sp>
+      <p:sp>
+        <p:nvSpPr>
+          <p:cNvPr id="8" name="TextBox 7"/>
+          <p:cNvSpPr txBox="1"/>
+          <p:nvPr/>
+        </p:nvSpPr>
+        <p:spPr>
+          <a:xfrm>
+            <a:off x="685800" y="2057400"/>
+            <a:ext cx="3291840" cy="1371600"/>
+          </a:xfrm>
+          <a:prstGeom prst="rect">
+            <a:avLst/>
+          </a:prstGeom>
+          <a:noFill/>
+        </p:spPr>
+        <p:txBody>
+          <a:bodyPr wrap="square" anchor="t" lIns="45720" rIns="45720" tIns="27432" bIns="27432">
+            <a:spAutoFit/>
+          </a:bodyPr>
+          <a:lstStyle/>
+          <a:p>
+            <a:pPr algn="l">
+              <a:lnSpc>
+                <a:spcPct val="120000"/>
+              </a:lnSpc>
+            </a:pPr>
+            <a:r>
+              <a:rPr sz="1300" b="0">
+                <a:solidFill>
+                  <a:srgbClr val="475569"/>
+                </a:solidFill>
+                <a:latin typeface="Apple SD Gothic Neo"/>
+              </a:rPr>
+              <a:t>CS가 사서함 하나(또는 PDF 한 장)로 판단. '언제 찍었나'·'고객이 봤나' 논쟁 자체가 사라짐</a:t>
+            </a:r>
+          </a:p>
+        </p:txBody>
+      </p:sp>
+      <p:sp>
+        <p:nvSpPr>
+          <p:cNvPr id="9" name="Rounded Rectangle 8"/>
+          <p:cNvSpPr/>
+          <p:nvPr/>
+        </p:nvSpPr>
+        <p:spPr>
+          <a:xfrm>
+            <a:off x="4297679" y="1554480"/>
+            <a:ext cx="3566160" cy="1965960"/>
           </a:xfrm>
           <a:prstGeom prst="roundRect">
             <a:avLst>
@@ -10976,14 +11420,14 @@
       </p:sp>
       <p:sp>
         <p:nvSpPr>
-          <p:cNvPr id="7" name="TextBox 6"/>
+          <p:cNvPr id="10" name="TextBox 9"/>
           <p:cNvSpPr txBox="1"/>
           <p:nvPr/>
         </p:nvSpPr>
         <p:spPr>
           <a:xfrm>
-            <a:off x="685800" y="1645920"/>
-            <a:ext cx="5120640" cy="411480"/>
+            <a:off x="4434839" y="1645920"/>
+            <a:ext cx="3291840" cy="411480"/>
           </a:xfrm>
           <a:prstGeom prst="rect">
             <a:avLst/>
@@ -11008,21 +11452,21 @@
                 </a:solidFill>
                 <a:latin typeface="Apple SD Gothic Neo"/>
               </a:rPr>
-              <a:t>2단계 연동 (파일럿 결과 후, 카모아 선택)</a:t>
-            </a:r>
-          </a:p>
-        </p:txBody>
-      </p:sp>
-      <p:sp>
-        <p:nvSpPr>
-          <p:cNvPr id="8" name="TextBox 7"/>
+              <a:t>리뷰 신뢰 지표 개선</a:t>
+            </a:r>
+          </a:p>
+        </p:txBody>
+      </p:sp>
+      <p:sp>
+        <p:nvSpPr>
+          <p:cNvPr id="11" name="TextBox 10"/>
           <p:cNvSpPr txBox="1"/>
           <p:nvPr/>
         </p:nvSpPr>
         <p:spPr>
           <a:xfrm>
-            <a:off x="685800" y="2057400"/>
-            <a:ext cx="5120640" cy="2057400"/>
+            <a:off x="4434839" y="2057400"/>
+            <a:ext cx="3291840" cy="1371600"/>
           </a:xfrm>
           <a:prstGeom prst="rect">
             <a:avLst/>
@@ -11047,69 +11491,21 @@
                 </a:solidFill>
                 <a:latin typeface="Apple SD Gothic Neo"/>
               </a:rPr>
-              <a:t>• 파트너스 ERP 손상 사진 항목에 '검증 링크' 필드 추가</a:t>
-            </a:r>
-          </a:p>
-          <a:p>
-            <a:pPr algn="l">
-              <a:lnSpc>
-                <a:spcPct val="120000"/>
-              </a:lnSpc>
-            </a:pPr>
-            <a:r>
-              <a:rPr sz="1300" b="0">
-                <a:solidFill>
-                  <a:srgbClr val="475569"/>
-                </a:solidFill>
-                <a:latin typeface="Apple SD Gothic Neo"/>
-              </a:rPr>
-              <a:t>• 직원용 앱에서 OriPics 딥링크 촬영 → 예약 번호 자동 첨부</a:t>
-            </a:r>
-          </a:p>
-          <a:p>
-            <a:pPr algn="l">
-              <a:lnSpc>
-                <a:spcPct val="120000"/>
-              </a:lnSpc>
-            </a:pPr>
-            <a:r>
-              <a:rPr sz="1300" b="0">
-                <a:solidFill>
-                  <a:srgbClr val="475569"/>
-                </a:solidFill>
-                <a:latin typeface="Apple SD Gothic Neo"/>
-              </a:rPr>
-              <a:t>• 카모아 앱 예약 상세에 인수·반납 링크 표시 → 고객이 앱 안에서 확인</a:t>
-            </a:r>
-          </a:p>
-          <a:p>
-            <a:pPr algn="l">
-              <a:lnSpc>
-                <a:spcPct val="120000"/>
-              </a:lnSpc>
-            </a:pPr>
-            <a:r>
-              <a:rPr sz="1300" b="0">
-                <a:solidFill>
-                  <a:srgbClr val="475569"/>
-                </a:solidFill>
-                <a:latin typeface="Apple SD Gothic Neo"/>
-              </a:rPr>
-              <a:t>• 검증 API: 카모아 CS 도구에서 링크 검증 결과 자동 표시</a:t>
-            </a:r>
-          </a:p>
-        </p:txBody>
-      </p:sp>
-      <p:sp>
-        <p:nvSpPr>
-          <p:cNvPr id="9" name="Rounded Rectangle 8"/>
+              <a:t>흠집·과태료 분쟁 후기('기스 20~50만 원', '과태료 2달 뒤 통보') 감소 → 리뷰 시스템 신뢰 강화</a:t>
+            </a:r>
+          </a:p>
+        </p:txBody>
+      </p:sp>
+      <p:sp>
+        <p:nvSpPr>
+          <p:cNvPr id="12" name="Rounded Rectangle 11"/>
           <p:cNvSpPr/>
           <p:nvPr/>
         </p:nvSpPr>
         <p:spPr>
           <a:xfrm>
-            <a:off x="6217920" y="1554480"/>
-            <a:ext cx="5394960" cy="2651760"/>
+            <a:off x="8046718" y="1554480"/>
+            <a:ext cx="3566160" cy="1965960"/>
           </a:xfrm>
           <a:prstGeom prst="roundRect">
             <a:avLst>
@@ -11117,7 +11513,7 @@
             </a:avLst>
           </a:prstGeom>
           <a:solidFill>
-            <a:srgbClr val="EFF6FF"/>
+            <a:srgbClr val="ECFDF5"/>
           </a:solidFill>
           <a:ln w="9525">
             <a:solidFill>
@@ -11150,14 +11546,14 @@
       </p:sp>
       <p:sp>
         <p:nvSpPr>
-          <p:cNvPr id="10" name="TextBox 9"/>
+          <p:cNvPr id="13" name="TextBox 12"/>
           <p:cNvSpPr txBox="1"/>
           <p:nvPr/>
         </p:nvSpPr>
         <p:spPr>
           <a:xfrm>
-            <a:off x="6355080" y="1645920"/>
-            <a:ext cx="5120640" cy="411480"/>
+            <a:off x="8183878" y="1645920"/>
+            <a:ext cx="3291840" cy="411480"/>
           </a:xfrm>
           <a:prstGeom prst="rect">
             <a:avLst/>
@@ -11178,25 +11574,25 @@
             <a:r>
               <a:rPr sz="1500" b="1">
                 <a:solidFill>
-                  <a:srgbClr val="1D4ED8"/>
-                </a:solidFill>
-                <a:latin typeface="Apple SD Gothic Neo"/>
-              </a:rPr>
-              <a:t>요금 모델 (파일럿 종료 후)</a:t>
-            </a:r>
-          </a:p>
-        </p:txBody>
-      </p:sp>
-      <p:sp>
-        <p:nvSpPr>
-          <p:cNvPr id="11" name="TextBox 10"/>
+                  <a:srgbClr val="047857"/>
+                </a:solidFill>
+                <a:latin typeface="Apple SD Gothic Neo"/>
+              </a:rPr>
+              <a:t>600개 업체 락인</a:t>
+            </a:r>
+          </a:p>
+        </p:txBody>
+      </p:sp>
+      <p:sp>
+        <p:nvSpPr>
+          <p:cNvPr id="14" name="TextBox 13"/>
           <p:cNvSpPr txBox="1"/>
           <p:nvPr/>
         </p:nvSpPr>
         <p:spPr>
           <a:xfrm>
-            <a:off x="6355080" y="2057400"/>
-            <a:ext cx="5120640" cy="2057400"/>
+            <a:off x="8183878" y="2057400"/>
+            <a:ext cx="3291840" cy="1371600"/>
           </a:xfrm>
           <a:prstGeom prst="rect">
             <a:avLst/>
@@ -11221,69 +11617,21 @@
                 </a:solidFill>
                 <a:latin typeface="Apple SD Gothic Neo"/>
               </a:rPr>
-              <a:t>• 파일럿 12주: 카모아·업체 부담 0원</a:t>
-            </a:r>
-          </a:p>
-          <a:p>
-            <a:pPr algn="l">
-              <a:lnSpc>
-                <a:spcPct val="120000"/>
-              </a:lnSpc>
-            </a:pPr>
-            <a:r>
-              <a:rPr sz="1300" b="0">
-                <a:solidFill>
-                  <a:srgbClr val="475569"/>
-                </a:solidFill>
-                <a:latin typeface="Apple SD Gothic Neo"/>
-              </a:rPr>
-              <a:t>• 이후 택1: 업체 정액 월 99,000원(5계정·촬영 무제한) 또는 차량당 월 500원</a:t>
-            </a:r>
-          </a:p>
-          <a:p>
-            <a:pPr algn="l">
-              <a:lnSpc>
-                <a:spcPct val="120000"/>
-              </a:lnSpc>
-            </a:pPr>
-            <a:r>
-              <a:rPr sz="1300" b="0">
-                <a:solidFill>
-                  <a:srgbClr val="475569"/>
-                </a:solidFill>
-                <a:latin typeface="Apple SD Gothic Neo"/>
-              </a:rPr>
-              <a:t>• 카모아가 배포·정산하면 파트너스 부가 서비스로 편입 가능</a:t>
-            </a:r>
-          </a:p>
-          <a:p>
-            <a:pPr algn="l">
-              <a:lnSpc>
-                <a:spcPct val="120000"/>
-              </a:lnSpc>
-            </a:pPr>
-            <a:r>
-              <a:rPr sz="1300" b="0">
-                <a:solidFill>
-                  <a:srgbClr val="475569"/>
-                </a:solidFill>
-                <a:latin typeface="Apple SD Gothic Neo"/>
-              </a:rPr>
-              <a:t>• 고객 개인은 원데이 패스 3,300원·Pro 9,900원 기존 상품 그대로</a:t>
-            </a:r>
-          </a:p>
-        </p:txBody>
-      </p:sp>
-      <p:sp>
-        <p:nvSpPr>
-          <p:cNvPr id="12" name="Rounded Rectangle 11"/>
+              <a:t>무료 ERP에 '검증 사진 + 고객 공유 + 열람 확인' 기능이 더해져 경쟁 플랫폼 이탈 유인 감소</a:t>
+            </a:r>
+          </a:p>
+        </p:txBody>
+      </p:sp>
+      <p:sp>
+        <p:nvSpPr>
+          <p:cNvPr id="15" name="Rounded Rectangle 14"/>
           <p:cNvSpPr/>
           <p:nvPr/>
         </p:nvSpPr>
         <p:spPr>
           <a:xfrm>
-            <a:off x="548640" y="4434840"/>
-            <a:ext cx="11064240" cy="1554480"/>
+            <a:off x="548640" y="3703320"/>
+            <a:ext cx="3566160" cy="1965960"/>
           </a:xfrm>
           <a:prstGeom prst="roundRect">
             <a:avLst>
@@ -11291,11 +11639,11 @@
             </a:avLst>
           </a:prstGeom>
           <a:solidFill>
-            <a:srgbClr val="FFFBEB"/>
+            <a:srgbClr val="FFFFFF"/>
           </a:solidFill>
           <a:ln w="9525">
             <a:solidFill>
-              <a:srgbClr val="FDE68A"/>
+              <a:srgbClr val="E2E8F0"/>
             </a:solidFill>
           </a:ln>
           <a:effectLst/>
@@ -11324,14 +11672,14 @@
       </p:sp>
       <p:sp>
         <p:nvSpPr>
-          <p:cNvPr id="13" name="TextBox 12"/>
+          <p:cNvPr id="16" name="TextBox 15"/>
           <p:cNvSpPr txBox="1"/>
           <p:nvPr/>
         </p:nvSpPr>
         <p:spPr>
           <a:xfrm>
-            <a:off x="731520" y="4526280"/>
-            <a:ext cx="10789920" cy="365760"/>
+            <a:off x="685800" y="3794760"/>
+            <a:ext cx="3291840" cy="411480"/>
           </a:xfrm>
           <a:prstGeom prst="rect">
             <a:avLst/>
@@ -11350,27 +11698,27 @@
               </a:lnSpc>
             </a:pPr>
             <a:r>
-              <a:rPr sz="1400" b="1">
-                <a:solidFill>
-                  <a:srgbClr val="B45309"/>
-                </a:solidFill>
-                <a:latin typeface="Apple SD Gothic Neo"/>
-              </a:rPr>
-              <a:t>준수 사항</a:t>
-            </a:r>
-          </a:p>
-        </p:txBody>
-      </p:sp>
-      <p:sp>
-        <p:nvSpPr>
-          <p:cNvPr id="14" name="TextBox 13"/>
+              <a:rPr sz="1500" b="1">
+                <a:solidFill>
+                  <a:srgbClr val="0F172A"/>
+                </a:solidFill>
+                <a:latin typeface="Apple SD Gothic Neo"/>
+              </a:rPr>
+              <a:t>업체 손실 방어</a:t>
+            </a:r>
+          </a:p>
+        </p:txBody>
+      </p:sp>
+      <p:sp>
+        <p:nvSpPr>
+          <p:cNvPr id="17" name="TextBox 16"/>
           <p:cNvSpPr txBox="1"/>
           <p:nvPr/>
         </p:nvSpPr>
         <p:spPr>
           <a:xfrm>
-            <a:off x="731520" y="4892040"/>
-            <a:ext cx="10789920" cy="1097280"/>
+            <a:off x="685800" y="4206240"/>
+            <a:ext cx="3291840" cy="1371600"/>
           </a:xfrm>
           <a:prstGeom prst="rect">
             <a:avLst/>
@@ -11385,33 +11733,269 @@
           <a:p>
             <a:pPr algn="l">
               <a:lnSpc>
-                <a:spcPct val="125000"/>
-              </a:lnSpc>
-            </a:pPr>
-            <a:r>
-              <a:rPr sz="1200" b="0">
+                <a:spcPct val="120000"/>
+              </a:lnSpc>
+            </a:pPr>
+            <a:r>
+              <a:rPr sz="1300" b="0">
                 <a:solidFill>
                   <a:srgbClr val="475569"/>
                 </a:solidFill>
                 <a:latin typeface="Apple SD Gothic Neo"/>
               </a:rPr>
-              <a:t>• 차량번호·고객 얼굴이 포함될 수 있는 사진은 기기에서 지정 메일로 직접 전송되며 OriPics 서버에 저장되지 않습니다(공개링크 발행분 제외).</a:t>
-            </a:r>
-          </a:p>
-          <a:p>
-            <a:pPr algn="l">
-              <a:lnSpc>
-                <a:spcPct val="125000"/>
-              </a:lnSpc>
-            </a:pPr>
-            <a:r>
-              <a:rPr sz="1200" b="0">
+              <a:t>확인서 PDF(참여자·사진별 시각·좌표·QR·열람)로 과태료(서울 적발 1위 업종=렌터카)·손상 청구·보험 소명 근거 확보</a:t>
+            </a:r>
+          </a:p>
+        </p:txBody>
+      </p:sp>
+      <p:sp>
+        <p:nvSpPr>
+          <p:cNvPr id="18" name="Rounded Rectangle 17"/>
+          <p:cNvSpPr/>
+          <p:nvPr/>
+        </p:nvSpPr>
+        <p:spPr>
+          <a:xfrm>
+            <a:off x="4297679" y="3703320"/>
+            <a:ext cx="3566160" cy="1965960"/>
+          </a:xfrm>
+          <a:prstGeom prst="roundRect">
+            <a:avLst>
+              <a:gd name="adj" fmla="val 8000"/>
+            </a:avLst>
+          </a:prstGeom>
+          <a:solidFill>
+            <a:srgbClr val="FFFFFF"/>
+          </a:solidFill>
+          <a:ln w="9525">
+            <a:solidFill>
+              <a:srgbClr val="E2E8F0"/>
+            </a:solidFill>
+          </a:ln>
+          <a:effectLst/>
+        </p:spPr>
+        <p:style>
+          <a:lnRef idx="1">
+            <a:schemeClr val="accent1"/>
+          </a:lnRef>
+          <a:fillRef idx="3">
+            <a:schemeClr val="accent1"/>
+          </a:fillRef>
+          <a:effectRef idx="2">
+            <a:schemeClr val="accent1"/>
+          </a:effectRef>
+          <a:fontRef idx="minor">
+            <a:schemeClr val="lt1"/>
+          </a:fontRef>
+        </p:style>
+        <p:txBody>
+          <a:bodyPr rtlCol="0" anchor="ctr"/>
+          <a:lstStyle/>
+          <a:p>
+            <a:pPr algn="ctr"/>
+          </a:p>
+        </p:txBody>
+      </p:sp>
+      <p:sp>
+        <p:nvSpPr>
+          <p:cNvPr id="19" name="TextBox 18"/>
+          <p:cNvSpPr txBox="1"/>
+          <p:nvPr/>
+        </p:nvSpPr>
+        <p:spPr>
+          <a:xfrm>
+            <a:off x="4434839" y="3794760"/>
+            <a:ext cx="3291840" cy="411480"/>
+          </a:xfrm>
+          <a:prstGeom prst="rect">
+            <a:avLst/>
+          </a:prstGeom>
+          <a:noFill/>
+        </p:spPr>
+        <p:txBody>
+          <a:bodyPr wrap="square" anchor="t" lIns="45720" rIns="45720" tIns="27432" bIns="27432">
+            <a:spAutoFit/>
+          </a:bodyPr>
+          <a:lstStyle/>
+          <a:p>
+            <a:pPr algn="l">
+              <a:lnSpc>
+                <a:spcPct val="115000"/>
+              </a:lnSpc>
+            </a:pPr>
+            <a:r>
+              <a:rPr sz="1500" b="1">
+                <a:solidFill>
+                  <a:srgbClr val="0F172A"/>
+                </a:solidFill>
+                <a:latin typeface="Apple SD Gothic Neo"/>
+              </a:rPr>
+              <a:t>보도·마케팅 소재</a:t>
+            </a:r>
+          </a:p>
+        </p:txBody>
+      </p:sp>
+      <p:sp>
+        <p:nvSpPr>
+          <p:cNvPr id="20" name="TextBox 19"/>
+          <p:cNvSpPr txBox="1"/>
+          <p:nvPr/>
+        </p:nvSpPr>
+        <p:spPr>
+          <a:xfrm>
+            <a:off x="4434839" y="4206240"/>
+            <a:ext cx="3291840" cy="1371600"/>
+          </a:xfrm>
+          <a:prstGeom prst="rect">
+            <a:avLst/>
+          </a:prstGeom>
+          <a:noFill/>
+        </p:spPr>
+        <p:txBody>
+          <a:bodyPr wrap="square" anchor="t" lIns="45720" rIns="45720" tIns="27432" bIns="27432">
+            <a:spAutoFit/>
+          </a:bodyPr>
+          <a:lstStyle/>
+          <a:p>
+            <a:pPr algn="l">
+              <a:lnSpc>
+                <a:spcPct val="120000"/>
+              </a:lnSpc>
+            </a:pPr>
+            <a:r>
+              <a:rPr sz="1300" b="0">
                 <a:solidFill>
                   <a:srgbClr val="475569"/>
                 </a:solidFill>
                 <a:latin typeface="Apple SD Gothic Neo"/>
               </a:rPr>
-              <a:t>• OriPics는 촬영 시각·위치·기기·원본 여부를 증명하는 도구이며 증거 능력 인정은 심사 기관(보험사·법원)이 판단합니다. 촬영 시점 기기 검증은 앱 촬영분에 적용됩니다.</a:t>
+              <a:t>'C2PA 적합성 인증 제품을 채택한 첫 렌터카 플랫폼' — 신뢰를 파는 플랫폼에 맞는 메시지</a:t>
+            </a:r>
+          </a:p>
+        </p:txBody>
+      </p:sp>
+      <p:sp>
+        <p:nvSpPr>
+          <p:cNvPr id="21" name="Rounded Rectangle 20"/>
+          <p:cNvSpPr/>
+          <p:nvPr/>
+        </p:nvSpPr>
+        <p:spPr>
+          <a:xfrm>
+            <a:off x="8046718" y="3703320"/>
+            <a:ext cx="3566160" cy="1965960"/>
+          </a:xfrm>
+          <a:prstGeom prst="roundRect">
+            <a:avLst>
+              <a:gd name="adj" fmla="val 8000"/>
+            </a:avLst>
+          </a:prstGeom>
+          <a:solidFill>
+            <a:srgbClr val="FFFFFF"/>
+          </a:solidFill>
+          <a:ln w="9525">
+            <a:solidFill>
+              <a:srgbClr val="E2E8F0"/>
+            </a:solidFill>
+          </a:ln>
+          <a:effectLst/>
+        </p:spPr>
+        <p:style>
+          <a:lnRef idx="1">
+            <a:schemeClr val="accent1"/>
+          </a:lnRef>
+          <a:fillRef idx="3">
+            <a:schemeClr val="accent1"/>
+          </a:fillRef>
+          <a:effectRef idx="2">
+            <a:schemeClr val="accent1"/>
+          </a:effectRef>
+          <a:fontRef idx="minor">
+            <a:schemeClr val="lt1"/>
+          </a:fontRef>
+        </p:style>
+        <p:txBody>
+          <a:bodyPr rtlCol="0" anchor="ctr"/>
+          <a:lstStyle/>
+          <a:p>
+            <a:pPr algn="ctr"/>
+          </a:p>
+        </p:txBody>
+      </p:sp>
+      <p:sp>
+        <p:nvSpPr>
+          <p:cNvPr id="22" name="TextBox 21"/>
+          <p:cNvSpPr txBox="1"/>
+          <p:nvPr/>
+        </p:nvSpPr>
+        <p:spPr>
+          <a:xfrm>
+            <a:off x="8183878" y="3794760"/>
+            <a:ext cx="3291840" cy="411480"/>
+          </a:xfrm>
+          <a:prstGeom prst="rect">
+            <a:avLst/>
+          </a:prstGeom>
+          <a:noFill/>
+        </p:spPr>
+        <p:txBody>
+          <a:bodyPr wrap="square" anchor="t" lIns="45720" rIns="45720" tIns="27432" bIns="27432">
+            <a:spAutoFit/>
+          </a:bodyPr>
+          <a:lstStyle/>
+          <a:p>
+            <a:pPr algn="l">
+              <a:lnSpc>
+                <a:spcPct val="115000"/>
+              </a:lnSpc>
+            </a:pPr>
+            <a:r>
+              <a:rPr sz="1500" b="1">
+                <a:solidFill>
+                  <a:srgbClr val="0F172A"/>
+                </a:solidFill>
+                <a:latin typeface="Apple SD Gothic Neo"/>
+              </a:rPr>
+              <a:t>개발 없이, 비용 없이</a:t>
+            </a:r>
+          </a:p>
+        </p:txBody>
+      </p:sp>
+      <p:sp>
+        <p:nvSpPr>
+          <p:cNvPr id="23" name="TextBox 22"/>
+          <p:cNvSpPr txBox="1"/>
+          <p:nvPr/>
+        </p:nvSpPr>
+        <p:spPr>
+          <a:xfrm>
+            <a:off x="8183878" y="4206240"/>
+            <a:ext cx="3291840" cy="1371600"/>
+          </a:xfrm>
+          <a:prstGeom prst="rect">
+            <a:avLst/>
+          </a:prstGeom>
+          <a:noFill/>
+        </p:spPr>
+        <p:txBody>
+          <a:bodyPr wrap="square" anchor="t" lIns="45720" rIns="45720" tIns="27432" bIns="27432">
+            <a:spAutoFit/>
+          </a:bodyPr>
+          <a:lstStyle/>
+          <a:p>
+            <a:pPr algn="l">
+              <a:lnSpc>
+                <a:spcPct val="120000"/>
+              </a:lnSpc>
+            </a:pPr>
+            <a:r>
+              <a:rPr sz="1300" b="0">
+                <a:solidFill>
+                  <a:srgbClr val="475569"/>
+                </a:solidFill>
+                <a:latin typeface="Apple SD Gothic Neo"/>
+              </a:rPr>
+              <a:t>자체 개발 시 기기 검증·원본 판정·C2PA 서명·공유·열람 확인 각각 수개월. 파일럿은 공지 한 번과 CS 계정 하나</a:t>
             </a:r>
           </a:p>
         </p:txBody>
